--- a/media/module2/slides.pptx
+++ b/media/module2/slides.pptx
@@ -26,6 +26,21 @@
     <p:sldId id="274" r:id="rId26"/>
     <p:sldId id="275" r:id="rId27"/>
     <p:sldId id="276" r:id="rId28"/>
+    <p:sldId id="277" r:id="rId29"/>
+    <p:sldId id="278" r:id="rId30"/>
+    <p:sldId id="279" r:id="rId31"/>
+    <p:sldId id="280" r:id="rId32"/>
+    <p:sldId id="281" r:id="rId33"/>
+    <p:sldId id="282" r:id="rId34"/>
+    <p:sldId id="283" r:id="rId35"/>
+    <p:sldId id="284" r:id="rId36"/>
+    <p:sldId id="285" r:id="rId37"/>
+    <p:sldId id="286" r:id="rId38"/>
+    <p:sldId id="287" r:id="rId39"/>
+    <p:sldId id="288" r:id="rId40"/>
+    <p:sldId id="289" r:id="rId41"/>
+    <p:sldId id="290" r:id="rId42"/>
+    <p:sldId id="291" r:id="rId43"/>
   </p:sldIdLst>
   <p:sldSz cx="12191695" cy="6858000" type="screen4x3"/>
   <p:notesSz cx="6858000" cy="9144000"/>
@@ -522,7 +537,567 @@
           <a:lstStyle/>
           <a:p>
             <a:r>
+              <a:t>From docs/MODULE2.md — read guides before running demos.</a:t>
+            </a:r>
+          </a:p>
+        </p:txBody>
+      </p:sp>
+      <p:sp>
+        <p:nvSpPr>
+          <p:cNvPr id="4" name="Slide Number Placeholder 3"/>
+          <p:cNvSpPr>
+            <a:spLocks noGrp="1"/>
+          </p:cNvSpPr>
+          <p:nvPr>
+            <p:ph type="sldNum" idx="5" sz="quarter"/>
+          </p:nvPr>
+        </p:nvSpPr>
+        <p:spPr/>
+      </p:sp>
+    </p:spTree>
+  </p:cSld>
+  <p:clrMapOvr>
+    <a:masterClrMapping/>
+  </p:clrMapOvr>
+</p:notes>
+</file>
+
+<file path=ppt/notesSlides/notesSlide10.xml><?xml version="1.0" encoding="utf-8"?>
+<p:notes xmlns:a="http://schemas.openxmlformats.org/drawingml/2006/main" xmlns:p="http://schemas.openxmlformats.org/presentationml/2006/main" xmlns:r="http://schemas.openxmlformats.org/officeDocument/2006/relationships">
+  <p:cSld>
+    <p:spTree>
+      <p:nvGrpSpPr>
+        <p:cNvPr id="1" name=""/>
+        <p:cNvGrpSpPr/>
+        <p:nvPr/>
+      </p:nvGrpSpPr>
+      <p:grpSpPr>
+        <a:xfrm>
+          <a:off x="0" y="0"/>
+          <a:ext cx="0" cy="0"/>
+          <a:chOff x="0" y="0"/>
+          <a:chExt cx="0" cy="0"/>
+        </a:xfrm>
+      </p:grpSpPr>
+      <p:sp>
+        <p:nvSpPr>
+          <p:cNvPr id="2" name="Slide Image Placeholder 1"/>
+          <p:cNvSpPr>
+            <a:spLocks noGrp="1"/>
+          </p:cNvSpPr>
+          <p:nvPr>
+            <p:ph type="sldImg" idx="2"/>
+          </p:nvPr>
+        </p:nvSpPr>
+        <p:spPr/>
+      </p:sp>
+      <p:sp>
+        <p:nvSpPr>
+          <p:cNvPr id="3" name="Notes Placeholder 2"/>
+          <p:cNvSpPr>
+            <a:spLocks noGrp="1"/>
+          </p:cNvSpPr>
+          <p:nvPr>
+            <p:ph type="body" idx="3" sz="quarter"/>
+          </p:nvPr>
+        </p:nvSpPr>
+        <p:spPr/>
+        <p:txBody>
+          <a:bodyPr/>
+          <a:lstStyle/>
+          <a:p>
+            <a:r>
               <a:t>From MODULE2 Topics Covered.</a:t>
+            </a:r>
+          </a:p>
+        </p:txBody>
+      </p:sp>
+      <p:sp>
+        <p:nvSpPr>
+          <p:cNvPr id="4" name="Slide Number Placeholder 3"/>
+          <p:cNvSpPr>
+            <a:spLocks noGrp="1"/>
+          </p:cNvSpPr>
+          <p:nvPr>
+            <p:ph type="sldNum" idx="5" sz="quarter"/>
+          </p:nvPr>
+        </p:nvSpPr>
+        <p:spPr/>
+      </p:sp>
+    </p:spTree>
+  </p:cSld>
+  <p:clrMapOvr>
+    <a:masterClrMapping/>
+  </p:clrMapOvr>
+</p:notes>
+</file>
+
+<file path=ppt/notesSlides/notesSlide11.xml><?xml version="1.0" encoding="utf-8"?>
+<p:notes xmlns:a="http://schemas.openxmlformats.org/drawingml/2006/main" xmlns:p="http://schemas.openxmlformats.org/presentationml/2006/main" xmlns:r="http://schemas.openxmlformats.org/officeDocument/2006/relationships">
+  <p:cSld>
+    <p:spTree>
+      <p:nvGrpSpPr>
+        <p:cNvPr id="1" name=""/>
+        <p:cNvGrpSpPr/>
+        <p:nvPr/>
+      </p:nvGrpSpPr>
+      <p:grpSpPr>
+        <a:xfrm>
+          <a:off x="0" y="0"/>
+          <a:ext cx="0" cy="0"/>
+          <a:chOff x="0" y="0"/>
+          <a:chExt cx="0" cy="0"/>
+        </a:xfrm>
+      </p:grpSpPr>
+      <p:sp>
+        <p:nvSpPr>
+          <p:cNvPr id="2" name="Slide Image Placeholder 1"/>
+          <p:cNvSpPr>
+            <a:spLocks noGrp="1"/>
+          </p:cNvSpPr>
+          <p:nvPr>
+            <p:ph type="sldImg" idx="2"/>
+          </p:nvPr>
+        </p:nvSpPr>
+        <p:spPr/>
+      </p:sp>
+      <p:sp>
+        <p:nvSpPr>
+          <p:cNvPr id="3" name="Notes Placeholder 2"/>
+          <p:cNvSpPr>
+            <a:spLocks noGrp="1"/>
+          </p:cNvSpPr>
+          <p:nvPr>
+            <p:ph type="body" idx="3" sz="quarter"/>
+          </p:nvPr>
+        </p:nvSpPr>
+        <p:spPr/>
+        <p:txBody>
+          <a:bodyPr/>
+          <a:lstStyle/>
+          <a:p>
+            <a:r>
+              <a:t>Full detail in docs/MODULE2.md command reference.</a:t>
+            </a:r>
+          </a:p>
+        </p:txBody>
+      </p:sp>
+      <p:sp>
+        <p:nvSpPr>
+          <p:cNvPr id="4" name="Slide Number Placeholder 3"/>
+          <p:cNvSpPr>
+            <a:spLocks noGrp="1"/>
+          </p:cNvSpPr>
+          <p:nvPr>
+            <p:ph type="sldNum" idx="5" sz="quarter"/>
+          </p:nvPr>
+        </p:nvSpPr>
+        <p:spPr/>
+      </p:sp>
+    </p:spTree>
+  </p:cSld>
+  <p:clrMapOvr>
+    <a:masterClrMapping/>
+  </p:clrMapOvr>
+</p:notes>
+</file>
+
+<file path=ppt/notesSlides/notesSlide12.xml><?xml version="1.0" encoding="utf-8"?>
+<p:notes xmlns:a="http://schemas.openxmlformats.org/drawingml/2006/main" xmlns:p="http://schemas.openxmlformats.org/presentationml/2006/main" xmlns:r="http://schemas.openxmlformats.org/officeDocument/2006/relationships">
+  <p:cSld>
+    <p:spTree>
+      <p:nvGrpSpPr>
+        <p:cNvPr id="1" name=""/>
+        <p:cNvGrpSpPr/>
+        <p:nvPr/>
+      </p:nvGrpSpPr>
+      <p:grpSpPr>
+        <a:xfrm>
+          <a:off x="0" y="0"/>
+          <a:ext cx="0" cy="0"/>
+          <a:chOff x="0" y="0"/>
+          <a:chExt cx="0" cy="0"/>
+        </a:xfrm>
+      </p:grpSpPr>
+      <p:sp>
+        <p:nvSpPr>
+          <p:cNvPr id="2" name="Slide Image Placeholder 1"/>
+          <p:cNvSpPr>
+            <a:spLocks noGrp="1"/>
+          </p:cNvSpPr>
+          <p:nvPr>
+            <p:ph type="sldImg" idx="2"/>
+          </p:nvPr>
+        </p:nvSpPr>
+        <p:spPr/>
+      </p:sp>
+      <p:sp>
+        <p:nvSpPr>
+          <p:cNvPr id="3" name="Notes Placeholder 2"/>
+          <p:cNvSpPr>
+            <a:spLocks noGrp="1"/>
+          </p:cNvSpPr>
+          <p:nvPr>
+            <p:ph type="body" idx="3" sz="quarter"/>
+          </p:nvPr>
+        </p:nvSpPr>
+        <p:spPr/>
+        <p:txBody>
+          <a:bodyPr/>
+          <a:lstStyle/>
+          <a:p>
+            <a:r>
+              <a:t>Full detail in docs/MODULE2.md command reference.</a:t>
+            </a:r>
+          </a:p>
+        </p:txBody>
+      </p:sp>
+      <p:sp>
+        <p:nvSpPr>
+          <p:cNvPr id="4" name="Slide Number Placeholder 3"/>
+          <p:cNvSpPr>
+            <a:spLocks noGrp="1"/>
+          </p:cNvSpPr>
+          <p:nvPr>
+            <p:ph type="sldNum" idx="5" sz="quarter"/>
+          </p:nvPr>
+        </p:nvSpPr>
+        <p:spPr/>
+      </p:sp>
+    </p:spTree>
+  </p:cSld>
+  <p:clrMapOvr>
+    <a:masterClrMapping/>
+  </p:clrMapOvr>
+</p:notes>
+</file>
+
+<file path=ppt/notesSlides/notesSlide13.xml><?xml version="1.0" encoding="utf-8"?>
+<p:notes xmlns:a="http://schemas.openxmlformats.org/drawingml/2006/main" xmlns:p="http://schemas.openxmlformats.org/presentationml/2006/main" xmlns:r="http://schemas.openxmlformats.org/officeDocument/2006/relationships">
+  <p:cSld>
+    <p:spTree>
+      <p:nvGrpSpPr>
+        <p:cNvPr id="1" name=""/>
+        <p:cNvGrpSpPr/>
+        <p:nvPr/>
+      </p:nvGrpSpPr>
+      <p:grpSpPr>
+        <a:xfrm>
+          <a:off x="0" y="0"/>
+          <a:ext cx="0" cy="0"/>
+          <a:chOff x="0" y="0"/>
+          <a:chExt cx="0" cy="0"/>
+        </a:xfrm>
+      </p:grpSpPr>
+      <p:sp>
+        <p:nvSpPr>
+          <p:cNvPr id="2" name="Slide Image Placeholder 1"/>
+          <p:cNvSpPr>
+            <a:spLocks noGrp="1"/>
+          </p:cNvSpPr>
+          <p:nvPr>
+            <p:ph type="sldImg" idx="2"/>
+          </p:nvPr>
+        </p:nvSpPr>
+        <p:spPr/>
+      </p:sp>
+      <p:sp>
+        <p:nvSpPr>
+          <p:cNvPr id="3" name="Notes Placeholder 2"/>
+          <p:cNvSpPr>
+            <a:spLocks noGrp="1"/>
+          </p:cNvSpPr>
+          <p:nvPr>
+            <p:ph type="body" idx="3" sz="quarter"/>
+          </p:nvPr>
+        </p:nvSpPr>
+        <p:spPr/>
+        <p:txBody>
+          <a:bodyPr/>
+          <a:lstStyle/>
+          <a:p>
+            <a:r>
+              <a:t>Full detail in docs/MODULE2.md command reference.</a:t>
+            </a:r>
+          </a:p>
+        </p:txBody>
+      </p:sp>
+      <p:sp>
+        <p:nvSpPr>
+          <p:cNvPr id="4" name="Slide Number Placeholder 3"/>
+          <p:cNvSpPr>
+            <a:spLocks noGrp="1"/>
+          </p:cNvSpPr>
+          <p:nvPr>
+            <p:ph type="sldNum" idx="5" sz="quarter"/>
+          </p:nvPr>
+        </p:nvSpPr>
+        <p:spPr/>
+      </p:sp>
+    </p:spTree>
+  </p:cSld>
+  <p:clrMapOvr>
+    <a:masterClrMapping/>
+  </p:clrMapOvr>
+</p:notes>
+</file>
+
+<file path=ppt/notesSlides/notesSlide14.xml><?xml version="1.0" encoding="utf-8"?>
+<p:notes xmlns:a="http://schemas.openxmlformats.org/drawingml/2006/main" xmlns:p="http://schemas.openxmlformats.org/presentationml/2006/main" xmlns:r="http://schemas.openxmlformats.org/officeDocument/2006/relationships">
+  <p:cSld>
+    <p:spTree>
+      <p:nvGrpSpPr>
+        <p:cNvPr id="1" name=""/>
+        <p:cNvGrpSpPr/>
+        <p:nvPr/>
+      </p:nvGrpSpPr>
+      <p:grpSpPr>
+        <a:xfrm>
+          <a:off x="0" y="0"/>
+          <a:ext cx="0" cy="0"/>
+          <a:chOff x="0" y="0"/>
+          <a:chExt cx="0" cy="0"/>
+        </a:xfrm>
+      </p:grpSpPr>
+      <p:sp>
+        <p:nvSpPr>
+          <p:cNvPr id="2" name="Slide Image Placeholder 1"/>
+          <p:cNvSpPr>
+            <a:spLocks noGrp="1"/>
+          </p:cNvSpPr>
+          <p:nvPr>
+            <p:ph type="sldImg" idx="2"/>
+          </p:nvPr>
+        </p:nvSpPr>
+        <p:spPr/>
+      </p:sp>
+      <p:sp>
+        <p:nvSpPr>
+          <p:cNvPr id="3" name="Notes Placeholder 2"/>
+          <p:cNvSpPr>
+            <a:spLocks noGrp="1"/>
+          </p:cNvSpPr>
+          <p:nvPr>
+            <p:ph type="body" idx="3" sz="quarter"/>
+          </p:nvPr>
+        </p:nvSpPr>
+        <p:spPr/>
+        <p:txBody>
+          <a:bodyPr/>
+          <a:lstStyle/>
+          <a:p>
+            <a:r>
+              <a:t>Run from course repository root.</a:t>
+            </a:r>
+          </a:p>
+        </p:txBody>
+      </p:sp>
+      <p:sp>
+        <p:nvSpPr>
+          <p:cNvPr id="4" name="Slide Number Placeholder 3"/>
+          <p:cNvSpPr>
+            <a:spLocks noGrp="1"/>
+          </p:cNvSpPr>
+          <p:nvPr>
+            <p:ph type="sldNum" idx="5" sz="quarter"/>
+          </p:nvPr>
+        </p:nvSpPr>
+        <p:spPr/>
+      </p:sp>
+    </p:spTree>
+  </p:cSld>
+  <p:clrMapOvr>
+    <a:masterClrMapping/>
+  </p:clrMapOvr>
+</p:notes>
+</file>
+
+<file path=ppt/notesSlides/notesSlide15.xml><?xml version="1.0" encoding="utf-8"?>
+<p:notes xmlns:a="http://schemas.openxmlformats.org/drawingml/2006/main" xmlns:p="http://schemas.openxmlformats.org/presentationml/2006/main" xmlns:r="http://schemas.openxmlformats.org/officeDocument/2006/relationships">
+  <p:cSld>
+    <p:spTree>
+      <p:nvGrpSpPr>
+        <p:cNvPr id="1" name=""/>
+        <p:cNvGrpSpPr/>
+        <p:nvPr/>
+      </p:nvGrpSpPr>
+      <p:grpSpPr>
+        <a:xfrm>
+          <a:off x="0" y="0"/>
+          <a:ext cx="0" cy="0"/>
+          <a:chOff x="0" y="0"/>
+          <a:chExt cx="0" cy="0"/>
+        </a:xfrm>
+      </p:grpSpPr>
+      <p:sp>
+        <p:nvSpPr>
+          <p:cNvPr id="2" name="Slide Image Placeholder 1"/>
+          <p:cNvSpPr>
+            <a:spLocks noGrp="1"/>
+          </p:cNvSpPr>
+          <p:nvPr>
+            <p:ph type="sldImg" idx="2"/>
+          </p:nvPr>
+        </p:nvSpPr>
+        <p:spPr/>
+      </p:sp>
+      <p:sp>
+        <p:nvSpPr>
+          <p:cNvPr id="3" name="Notes Placeholder 2"/>
+          <p:cNvSpPr>
+            <a:spLocks noGrp="1"/>
+          </p:cNvSpPr>
+          <p:nvPr>
+            <p:ph type="body" idx="3" sz="quarter"/>
+          </p:nvPr>
+        </p:nvSpPr>
+        <p:spPr/>
+        <p:txBody>
+          <a:bodyPr/>
+          <a:lstStyle/>
+          <a:p>
+            <a:r>
+              <a:t>module2/examples/examples/uvm_smoke/README.md</a:t>
+            </a:r>
+          </a:p>
+        </p:txBody>
+      </p:sp>
+      <p:sp>
+        <p:nvSpPr>
+          <p:cNvPr id="4" name="Slide Number Placeholder 3"/>
+          <p:cNvSpPr>
+            <a:spLocks noGrp="1"/>
+          </p:cNvSpPr>
+          <p:nvPr>
+            <p:ph type="sldNum" idx="5" sz="quarter"/>
+          </p:nvPr>
+        </p:nvSpPr>
+        <p:spPr/>
+      </p:sp>
+    </p:spTree>
+  </p:cSld>
+  <p:clrMapOvr>
+    <a:masterClrMapping/>
+  </p:clrMapOvr>
+</p:notes>
+</file>
+
+<file path=ppt/notesSlides/notesSlide16.xml><?xml version="1.0" encoding="utf-8"?>
+<p:notes xmlns:a="http://schemas.openxmlformats.org/drawingml/2006/main" xmlns:p="http://schemas.openxmlformats.org/presentationml/2006/main" xmlns:r="http://schemas.openxmlformats.org/officeDocument/2006/relationships">
+  <p:cSld>
+    <p:spTree>
+      <p:nvGrpSpPr>
+        <p:cNvPr id="1" name=""/>
+        <p:cNvGrpSpPr/>
+        <p:nvPr/>
+      </p:nvGrpSpPr>
+      <p:grpSpPr>
+        <a:xfrm>
+          <a:off x="0" y="0"/>
+          <a:ext cx="0" cy="0"/>
+          <a:chOff x="0" y="0"/>
+          <a:chExt cx="0" cy="0"/>
+        </a:xfrm>
+      </p:grpSpPr>
+      <p:sp>
+        <p:nvSpPr>
+          <p:cNvPr id="2" name="Slide Image Placeholder 1"/>
+          <p:cNvSpPr>
+            <a:spLocks noGrp="1"/>
+          </p:cNvSpPr>
+          <p:nvPr>
+            <p:ph type="sldImg" idx="2"/>
+          </p:nvPr>
+        </p:nvSpPr>
+        <p:spPr/>
+      </p:sp>
+      <p:sp>
+        <p:nvSpPr>
+          <p:cNvPr id="3" name="Notes Placeholder 2"/>
+          <p:cNvSpPr>
+            <a:spLocks noGrp="1"/>
+          </p:cNvSpPr>
+          <p:nvPr>
+            <p:ph type="body" idx="3" sz="quarter"/>
+          </p:nvPr>
+        </p:nvSpPr>
+        <p:spPr/>
+        <p:txBody>
+          <a:bodyPr/>
+          <a:lstStyle/>
+          <a:p>
+            <a:r>
+              <a:t>Hands-on: module2/examples/examples/uvm_smoke/</a:t>
+            </a:r>
+          </a:p>
+        </p:txBody>
+      </p:sp>
+      <p:sp>
+        <p:nvSpPr>
+          <p:cNvPr id="4" name="Slide Number Placeholder 3"/>
+          <p:cNvSpPr>
+            <a:spLocks noGrp="1"/>
+          </p:cNvSpPr>
+          <p:nvPr>
+            <p:ph type="sldNum" idx="5" sz="quarter"/>
+          </p:nvPr>
+        </p:nvSpPr>
+        <p:spPr/>
+      </p:sp>
+    </p:spTree>
+  </p:cSld>
+  <p:clrMapOvr>
+    <a:masterClrMapping/>
+  </p:clrMapOvr>
+</p:notes>
+</file>
+
+<file path=ppt/notesSlides/notesSlide17.xml><?xml version="1.0" encoding="utf-8"?>
+<p:notes xmlns:a="http://schemas.openxmlformats.org/drawingml/2006/main" xmlns:p="http://schemas.openxmlformats.org/presentationml/2006/main" xmlns:r="http://schemas.openxmlformats.org/officeDocument/2006/relationships">
+  <p:cSld>
+    <p:spTree>
+      <p:nvGrpSpPr>
+        <p:cNvPr id="1" name=""/>
+        <p:cNvGrpSpPr/>
+        <p:nvPr/>
+      </p:nvGrpSpPr>
+      <p:grpSpPr>
+        <a:xfrm>
+          <a:off x="0" y="0"/>
+          <a:ext cx="0" cy="0"/>
+          <a:chOff x="0" y="0"/>
+          <a:chExt cx="0" cy="0"/>
+        </a:xfrm>
+      </p:grpSpPr>
+      <p:sp>
+        <p:nvSpPr>
+          <p:cNvPr id="2" name="Slide Image Placeholder 1"/>
+          <p:cNvSpPr>
+            <a:spLocks noGrp="1"/>
+          </p:cNvSpPr>
+          <p:nvPr>
+            <p:ph type="sldImg" idx="2"/>
+          </p:nvPr>
+        </p:nvSpPr>
+        <p:spPr/>
+      </p:sp>
+      <p:sp>
+        <p:nvSpPr>
+          <p:cNvPr id="3" name="Notes Placeholder 2"/>
+          <p:cNvSpPr>
+            <a:spLocks noGrp="1"/>
+          </p:cNvSpPr>
+          <p:nvPr>
+            <p:ph type="body" idx="3" sz="quarter"/>
+          </p:nvPr>
+        </p:nvSpPr>
+        <p:spPr/>
+        <p:txBody>
+          <a:bodyPr/>
+          <a:lstStyle/>
+          <a:p>
+            <a:r>
+              <a:t>From MODULE2 Learning Outcomes.</a:t>
             </a:r>
           </a:p>
         </p:txBody>
@@ -592,7 +1167,7 @@
           <a:lstStyle/>
           <a:p>
             <a:r>
-              <a:t>From MODULE2 Topics Covered.</a:t>
+              <a:t>From MODULE2 Design Architecture.</a:t>
             </a:r>
           </a:p>
         </p:txBody>
@@ -662,7 +1237,7 @@
           <a:lstStyle/>
           <a:p>
             <a:r>
-              <a:t>From MODULE2 Topics Covered.</a:t>
+              <a:t>From MODULE2 Design Architecture.</a:t>
             </a:r>
           </a:p>
         </p:txBody>
@@ -732,7 +1307,7 @@
           <a:lstStyle/>
           <a:p>
             <a:r>
-              <a:t>Full detail in docs/MODULE2.md command reference.</a:t>
+              <a:t>From MODULE2 Design Architecture.</a:t>
             </a:r>
           </a:p>
         </p:txBody>
@@ -802,7 +1377,7 @@
           <a:lstStyle/>
           <a:p>
             <a:r>
-              <a:t>Full detail in docs/MODULE2.md command reference.</a:t>
+              <a:t>From MODULE2 Verification &amp; Testing Methods.</a:t>
             </a:r>
           </a:p>
         </p:txBody>
@@ -872,7 +1447,7 @@
           <a:lstStyle/>
           <a:p>
             <a:r>
-              <a:t>Full detail in docs/MODULE2.md command reference.</a:t>
+              <a:t>From MODULE2 Verification &amp; Testing Methods.</a:t>
             </a:r>
           </a:p>
         </p:txBody>
@@ -942,7 +1517,7 @@
           <a:lstStyle/>
           <a:p>
             <a:r>
-              <a:t>Run from course repository root.</a:t>
+              <a:t>From MODULE2 Verification &amp; Testing Methods.</a:t>
             </a:r>
           </a:p>
         </p:txBody>
@@ -1012,7 +1587,7 @@
           <a:lstStyle/>
           <a:p>
             <a:r>
-              <a:t>module2/examples/uvm_smoke/README.md</a:t>
+              <a:t>From MODULE2 Topics Covered.</a:t>
             </a:r>
           </a:p>
         </p:txBody>
@@ -1082,7 +1657,7 @@
           <a:lstStyle/>
           <a:p>
             <a:r>
-              <a:t>Hands-on: module2/examples/uvm_smoke/</a:t>
+              <a:t>From MODULE2 Topics Covered.</a:t>
             </a:r>
           </a:p>
         </p:txBody>
@@ -4214,8 +4789,8 @@
         </p:nvSpPr>
         <p:spPr>
           <a:xfrm>
-            <a:off x="548640" y="2743200"/>
-            <a:ext cx="11064240" cy="1371600"/>
+            <a:off x="548640" y="411480"/>
+            <a:ext cx="11064240" cy="777240"/>
           </a:xfrm>
           <a:prstGeom prst="rect">
             <a:avLst/>
@@ -4228,11 +4803,11 @@
           </a:bodyPr>
           <a:lstStyle/>
           <a:p>
-            <a:pPr algn="ctr">
-              <a:lnSpc>
-                <a:spcPts val="2200"/>
-              </a:lnSpc>
-              <a:defRPr sz="3600" b="1">
+            <a:pPr>
+              <a:lnSpc>
+                <a:spcPts val="2200"/>
+              </a:lnSpc>
+              <a:defRPr sz="2800" b="1">
                 <a:solidFill>
                   <a:srgbClr val="1A1A2E"/>
                 </a:solidFill>
@@ -4240,14 +4815,77 @@
               </a:defRPr>
             </a:pPr>
             <a:r>
-              <a:t>Command reference highlights</a:t>
-            </a:r>
-          </a:p>
-        </p:txBody>
-      </p:sp>
-      <p:sp>
-        <p:nvSpPr>
-          <p:cNvPr id="3" name="TextBox 2"/>
+              <a:t>Verification environment architecture</a:t>
+            </a:r>
+          </a:p>
+        </p:txBody>
+      </p:sp>
+      <p:pic>
+        <p:nvPicPr>
+          <p:cNvPr id="3" name="Picture 2" descr="verification_architecture.png"/>
+          <p:cNvPicPr>
+            <a:picLocks noChangeAspect="1"/>
+          </p:cNvPicPr>
+          <p:nvPr/>
+        </p:nvPicPr>
+        <p:blipFill>
+          <a:blip r:embed="rId2"/>
+          <a:stretch>
+            <a:fillRect/>
+          </a:stretch>
+        </p:blipFill>
+        <p:spPr>
+          <a:xfrm>
+            <a:off x="548640" y="1143000"/>
+            <a:ext cx="8128000" cy="4572000"/>
+          </a:xfrm>
+          <a:prstGeom prst="rect">
+            <a:avLst/>
+          </a:prstGeom>
+        </p:spPr>
+      </p:pic>
+      <p:sp>
+        <p:nvSpPr>
+          <p:cNvPr id="4" name="TextBox 3"/>
+          <p:cNvSpPr txBox="1"/>
+          <p:nvPr/>
+        </p:nvSpPr>
+        <p:spPr>
+          <a:xfrm>
+            <a:off x="548640" y="5897880"/>
+            <a:ext cx="11064240" cy="411480"/>
+          </a:xfrm>
+          <a:prstGeom prst="rect">
+            <a:avLst/>
+          </a:prstGeom>
+          <a:noFill/>
+        </p:spPr>
+        <p:txBody>
+          <a:bodyPr wrap="square">
+            <a:noAutofit/>
+          </a:bodyPr>
+          <a:lstStyle/>
+          <a:p>
+            <a:pPr>
+              <a:lnSpc>
+                <a:spcPts val="2200"/>
+              </a:lnSpc>
+              <a:defRPr sz="1200" b="0">
+                <a:solidFill>
+                  <a:srgbClr val="333333"/>
+                </a:solidFill>
+                <a:latin typeface="Calibri"/>
+              </a:defRPr>
+            </a:pPr>
+            <a:r>
+              <a:t>Module 2: UVM layers, agents, and checkers for this phase.</a:t>
+            </a:r>
+          </a:p>
+        </p:txBody>
+      </p:sp>
+      <p:sp>
+        <p:nvSpPr>
+          <p:cNvPr id="5" name="TextBox 4"/>
           <p:cNvSpPr txBox="1"/>
           <p:nvPr/>
         </p:nvSpPr>
@@ -4336,7 +4974,7 @@
               </a:defRPr>
             </a:pPr>
             <a:r>
-              <a:t>Environment checks</a:t>
+              <a:t>1. DUT and interface</a:t>
             </a:r>
           </a:p>
         </p:txBody>
@@ -4378,7 +5016,64 @@
               </a:defRPr>
             </a:pPr>
             <a:r>
-              <a:t>• verilator --version</a:t>
+              <a:t>• simple_register.v: `enable`, `d`, `q` — minimal</a:t>
+            </a:r>
+          </a:p>
+          <a:p>
+            <a:pPr>
+              <a:lnSpc>
+                <a:spcPts val="2200"/>
+              </a:lnSpc>
+              <a:spcAft>
+                <a:spcPts val="1000"/>
+              </a:spcAft>
+              <a:defRPr sz="2000" b="0">
+                <a:solidFill>
+                  <a:srgbClr val="333333"/>
+                </a:solidFill>
+                <a:latin typeface="Calibri"/>
+              </a:defRPr>
+            </a:pPr>
+            <a:r>
+              <a:t>      storage for learning UVM data flow.</a:t>
+            </a:r>
+          </a:p>
+          <a:p>
+            <a:pPr>
+              <a:lnSpc>
+                <a:spcPts val="2200"/>
+              </a:lnSpc>
+              <a:spcAft>
+                <a:spcPts val="1000"/>
+              </a:spcAft>
+              <a:defRPr sz="2000" b="0">
+                <a:solidFill>
+                  <a:srgbClr val="333333"/>
+                </a:solidFill>
+                <a:latin typeface="Calibri"/>
+              </a:defRPr>
+            </a:pPr>
+            <a:r>
+              <a:t>• reg_if: virtual interface bundling `clk`, `rst_n`,</a:t>
+            </a:r>
+          </a:p>
+          <a:p>
+            <a:pPr>
+              <a:lnSpc>
+                <a:spcPts val="2200"/>
+              </a:lnSpc>
+              <a:spcAft>
+                <a:spcPts val="1000"/>
+              </a:spcAft>
+              <a:defRPr sz="2000" b="0">
+                <a:solidFill>
+                  <a:srgbClr val="333333"/>
+                </a:solidFill>
+                <a:latin typeface="Calibri"/>
+              </a:defRPr>
+            </a:pPr>
+            <a:r>
+              <a:t>      `enable`, `d`, `q` for the agent.</a:t>
             </a:r>
           </a:p>
         </p:txBody>
@@ -4474,7 +5169,7 @@
               </a:defRPr>
             </a:pPr>
             <a:r>
-              <a:t>Build and run uvm_smoke</a:t>
+              <a:t>2. UVM component hierarchy</a:t>
             </a:r>
           </a:p>
         </p:txBody>
@@ -4516,7 +5211,140 @@
               </a:defRPr>
             </a:pPr>
             <a:r>
-              <a:t>• cd module2/examples/uvm_smoke</a:t>
+              <a:t>• RegTransaction → one write operation (data + enable</a:t>
+            </a:r>
+          </a:p>
+          <a:p>
+            <a:pPr>
+              <a:lnSpc>
+                <a:spcPts val="2200"/>
+              </a:lnSpc>
+              <a:spcAft>
+                <a:spcPts val="1000"/>
+              </a:spcAft>
+              <a:defRPr sz="2000" b="0">
+                <a:solidFill>
+                  <a:srgbClr val="333333"/>
+                </a:solidFill>
+                <a:latin typeface="Calibri"/>
+              </a:defRPr>
+            </a:pPr>
+            <a:r>
+              <a:t>      + observed q).</a:t>
+            </a:r>
+          </a:p>
+          <a:p>
+            <a:pPr>
+              <a:lnSpc>
+                <a:spcPts val="2200"/>
+              </a:lnSpc>
+              <a:spcAft>
+                <a:spcPts val="1000"/>
+              </a:spcAft>
+              <a:defRPr sz="2000" b="0">
+                <a:solidFill>
+                  <a:srgbClr val="333333"/>
+                </a:solidFill>
+                <a:latin typeface="Calibri"/>
+              </a:defRPr>
+            </a:pPr>
+            <a:r>
+              <a:t>• RegSequence → stream of directed transactions.</a:t>
+            </a:r>
+          </a:p>
+          <a:p>
+            <a:pPr>
+              <a:lnSpc>
+                <a:spcPts val="2200"/>
+              </a:lnSpc>
+              <a:spcAft>
+                <a:spcPts val="1000"/>
+              </a:spcAft>
+              <a:defRPr sz="2000" b="0">
+                <a:solidFill>
+                  <a:srgbClr val="333333"/>
+                </a:solidFill>
+                <a:latin typeface="Calibri"/>
+              </a:defRPr>
+            </a:pPr>
+            <a:r>
+              <a:t>• RegDriver / RegMonitor → drive pins / sample pins</a:t>
+            </a:r>
+          </a:p>
+          <a:p>
+            <a:pPr>
+              <a:lnSpc>
+                <a:spcPts val="2200"/>
+              </a:lnSpc>
+              <a:spcAft>
+                <a:spcPts val="1000"/>
+              </a:spcAft>
+              <a:defRPr sz="2000" b="0">
+                <a:solidFill>
+                  <a:srgbClr val="333333"/>
+                </a:solidFill>
+                <a:latin typeface="Calibri"/>
+              </a:defRPr>
+            </a:pPr>
+            <a:r>
+              <a:t>      each cycle.</a:t>
+            </a:r>
+          </a:p>
+          <a:p>
+            <a:pPr>
+              <a:lnSpc>
+                <a:spcPts val="2200"/>
+              </a:lnSpc>
+              <a:spcAft>
+                <a:spcPts val="1000"/>
+              </a:spcAft>
+              <a:defRPr sz="2000" b="0">
+                <a:solidFill>
+                  <a:srgbClr val="333333"/>
+                </a:solidFill>
+                <a:latin typeface="Calibri"/>
+              </a:defRPr>
+            </a:pPr>
+            <a:r>
+              <a:t>• RegScoreboard → expected queue vs observed.</a:t>
+            </a:r>
+          </a:p>
+          <a:p>
+            <a:pPr>
+              <a:lnSpc>
+                <a:spcPts val="2200"/>
+              </a:lnSpc>
+              <a:spcAft>
+                <a:spcPts val="1000"/>
+              </a:spcAft>
+              <a:defRPr sz="2000" b="0">
+                <a:solidFill>
+                  <a:srgbClr val="333333"/>
+                </a:solidFill>
+                <a:latin typeface="Calibri"/>
+              </a:defRPr>
+            </a:pPr>
+            <a:r>
+              <a:t>• RegAgent, RegEnv, RegTest — standard UVM layering</a:t>
+            </a:r>
+          </a:p>
+          <a:p>
+            <a:pPr>
+              <a:lnSpc>
+                <a:spcPts val="2200"/>
+              </a:lnSpc>
+              <a:spcAft>
+                <a:spcPts val="1000"/>
+              </a:spcAft>
+              <a:defRPr sz="2000" b="0">
+                <a:solidFill>
+                  <a:srgbClr val="333333"/>
+                </a:solidFill>
+                <a:latin typeface="Calibri"/>
+              </a:defRPr>
+            </a:pPr>
+            <a:r>
+              <a:t>      used again in Modules 4, 6, 8.</a:t>
             </a:r>
           </a:p>
         </p:txBody>
@@ -4612,7 +5440,7 @@
               </a:defRPr>
             </a:pPr>
             <a:r>
-              <a:t>Module script (from repo root)</a:t>
+              <a:t>3. Build and simulation flow</a:t>
             </a:r>
           </a:p>
         </p:txBody>
@@ -4654,7 +5482,7 @@
               </a:defRPr>
             </a:pPr>
             <a:r>
-              <a:t>• ./scripts/module2.sh --check # Environment + UVM +</a:t>
+              <a:t>• Verilator compiles SV + UVM + C++; `+UVM_TESTNAME`</a:t>
             </a:r>
           </a:p>
           <a:p>
@@ -4673,7 +5501,45 @@
               </a:defRPr>
             </a:pPr>
             <a:r>
-              <a:t>      example dirs</a:t>
+              <a:t>      selects the test.</a:t>
+            </a:r>
+          </a:p>
+          <a:p>
+            <a:pPr>
+              <a:lnSpc>
+                <a:spcPts val="2200"/>
+              </a:lnSpc>
+              <a:spcAft>
+                <a:spcPts val="1000"/>
+              </a:spcAft>
+              <a:defRPr sz="2000" b="0">
+                <a:solidFill>
+                  <a:srgbClr val="333333"/>
+                </a:solidFill>
+                <a:latin typeface="Calibri"/>
+              </a:defRPr>
+            </a:pPr>
+            <a:r>
+              <a:t>• Phases: build → connect → run (objections hold</a:t>
+            </a:r>
+          </a:p>
+          <a:p>
+            <a:pPr>
+              <a:lnSpc>
+                <a:spcPts val="2200"/>
+              </a:lnSpc>
+              <a:spcAft>
+                <a:spcPts val="1000"/>
+              </a:spcAft>
+              <a:defRPr sz="2000" b="0">
+                <a:solidFill>
+                  <a:srgbClr val="333333"/>
+                </a:solidFill>
+                <a:latin typeface="Calibri"/>
+              </a:defRPr>
+            </a:pPr>
+            <a:r>
+              <a:t>      simulation until sequence completes).</a:t>
             </a:r>
           </a:p>
         </p:txBody>
@@ -4769,7 +5635,7 @@
               </a:defRPr>
             </a:pPr>
             <a:r>
-              <a:t>Hands-on examples</a:t>
+              <a:t>Verification &amp; testing methods</a:t>
             </a:r>
           </a:p>
         </p:txBody>
@@ -4865,58 +5731,14 @@
               </a:defRPr>
             </a:pPr>
             <a:r>
-              <a:t>Module 2 self-check</a:t>
-            </a:r>
-          </a:p>
-        </p:txBody>
-      </p:sp>
-      <p:sp>
-        <p:nvSpPr>
-          <p:cNvPr id="3" name="TextBox 2"/>
-          <p:cNvSpPr txBox="1"/>
-          <p:nvPr/>
-        </p:nvSpPr>
-        <p:spPr>
-          <a:xfrm>
-            <a:off x="548640" y="1051560"/>
-            <a:ext cx="11064240" cy="914400"/>
-          </a:xfrm>
-          <a:prstGeom prst="rect">
-            <a:avLst/>
-          </a:prstGeom>
-          <a:solidFill>
-            <a:srgbClr val="F4F4F4"/>
-          </a:solidFill>
-        </p:spPr>
-        <p:txBody>
-          <a:bodyPr wrap="square">
-            <a:noAutofit/>
-          </a:bodyPr>
-          <a:lstStyle/>
-          <a:p>
-            <a:pPr>
-              <a:lnSpc>
-                <a:spcPts val="2200"/>
-              </a:lnSpc>
-              <a:spcAft>
-                <a:spcPts val="200"/>
-              </a:spcAft>
-              <a:defRPr sz="2000" b="0">
-                <a:solidFill>
-                  <a:srgbClr val="333333"/>
-                </a:solidFill>
-                <a:latin typeface="Consolas"/>
-              </a:defRPr>
-            </a:pPr>
-            <a:r>
-              <a:t>$ ./scripts/module2.sh --check</a:t>
+              <a:t>Testing and closure flow</a:t>
             </a:r>
           </a:p>
         </p:txBody>
       </p:sp>
       <p:pic>
         <p:nvPicPr>
-          <p:cNvPr id="4" name="Picture 3" descr="module2_check.png"/>
+          <p:cNvPr id="3" name="Picture 2" descr="testing_methods.png"/>
           <p:cNvPicPr>
             <a:picLocks noChangeAspect="1"/>
           </p:cNvPicPr>
@@ -4930,14 +5752,53 @@
         </p:blipFill>
         <p:spPr>
           <a:xfrm>
-            <a:off x="548640" y="1965960"/>
-            <a:ext cx="7071358" cy="3977639"/>
+            <a:off x="548640" y="1143000"/>
+            <a:ext cx="8128000" cy="4572000"/>
           </a:xfrm>
           <a:prstGeom prst="rect">
             <a:avLst/>
           </a:prstGeom>
         </p:spPr>
       </p:pic>
+      <p:sp>
+        <p:nvSpPr>
+          <p:cNvPr id="4" name="TextBox 3"/>
+          <p:cNvSpPr txBox="1"/>
+          <p:nvPr/>
+        </p:nvSpPr>
+        <p:spPr>
+          <a:xfrm>
+            <a:off x="548640" y="5897880"/>
+            <a:ext cx="11064240" cy="411480"/>
+          </a:xfrm>
+          <a:prstGeom prst="rect">
+            <a:avLst/>
+          </a:prstGeom>
+          <a:noFill/>
+        </p:spPr>
+        <p:txBody>
+          <a:bodyPr wrap="square">
+            <a:noAutofit/>
+          </a:bodyPr>
+          <a:lstStyle/>
+          <a:p>
+            <a:pPr>
+              <a:lnSpc>
+                <a:spcPts val="2200"/>
+              </a:lnSpc>
+              <a:defRPr sz="1200" b="0">
+                <a:solidFill>
+                  <a:srgbClr val="333333"/>
+                </a:solidFill>
+                <a:latin typeface="Calibri"/>
+              </a:defRPr>
+            </a:pPr>
+            <a:r>
+              <a:t>Module 2: how tests, checks, and metrics close verification goals.</a:t>
+            </a:r>
+          </a:p>
+        </p:txBody>
+      </p:sp>
       <p:sp>
         <p:nvSpPr>
           <p:cNvPr id="5" name="TextBox 4"/>
@@ -5029,7 +5890,7 @@
               </a:defRPr>
             </a:pPr>
             <a:r>
-              <a:t>Example 1: UVM smoke test</a:t>
+              <a:t>1. Transaction-level verification</a:t>
             </a:r>
           </a:p>
         </p:txBody>
@@ -5071,7 +5932,7 @@
               </a:defRPr>
             </a:pPr>
             <a:r>
-              <a:t>• UVM phases and reporting (DRIVER, MONITOR,</a:t>
+              <a:t>• Stimulus is a transaction (what to write), not raw</a:t>
             </a:r>
           </a:p>
           <a:p>
@@ -5090,7 +5951,7 @@
               </a:defRPr>
             </a:pPr>
             <a:r>
-              <a:t>      SCOREBOARD messages).</a:t>
+              <a:t>      pin wiggles in `initial` blocks.</a:t>
             </a:r>
           </a:p>
           <a:p>
@@ -5109,7 +5970,7 @@
               </a:defRPr>
             </a:pPr>
             <a:r>
-              <a:t>• Directed sequence: a few data values (0x00, 0x01,</a:t>
+              <a:t>• The monitor reconstructs what happened on the bus;</a:t>
             </a:r>
           </a:p>
           <a:p>
@@ -5128,26 +5989,7 @@
               </a:defRPr>
             </a:pPr>
             <a:r>
-              <a:t>      0x55, 0xAA, 0xFF) driven and checked.</a:t>
-            </a:r>
-          </a:p>
-          <a:p>
-            <a:pPr>
-              <a:lnSpc>
-                <a:spcPts val="2200"/>
-              </a:lnSpc>
-              <a:spcAft>
-                <a:spcPts val="1000"/>
-              </a:spcAft>
-              <a:defRPr sz="2000" b="0">
-                <a:solidFill>
-                  <a:srgbClr val="333333"/>
-                </a:solidFill>
-                <a:latin typeface="Calibri"/>
-              </a:defRPr>
-            </a:pPr>
-            <a:r>
-              <a:t>• Final scoreboard summary (matches/mismatches).</a:t>
+              <a:t>      the scoreboard compares to expected.</a:t>
             </a:r>
           </a:p>
         </p:txBody>
@@ -5243,7 +6085,7 @@
               </a:defRPr>
             </a:pPr>
             <a:r>
-              <a:t>Demo: UVM smoke test</a:t>
+              <a:t>2. Directed regression in uvm_smoke</a:t>
             </a:r>
           </a:p>
         </p:txBody>
@@ -5256,15 +6098,13 @@
         </p:nvSpPr>
         <p:spPr>
           <a:xfrm>
-            <a:off x="548640" y="1051560"/>
-            <a:ext cx="11064240" cy="914400"/>
+            <a:off x="548640" y="1234440"/>
+            <a:ext cx="11064240" cy="4937760"/>
           </a:xfrm>
           <a:prstGeom prst="rect">
             <a:avLst/>
           </a:prstGeom>
-          <a:solidFill>
-            <a:srgbClr val="F4F4F4"/>
-          </a:solidFill>
+          <a:noFill/>
         </p:spPr>
         <p:txBody>
           <a:bodyPr wrap="square">
@@ -5277,48 +6117,81 @@
                 <a:spcPts val="2200"/>
               </a:lnSpc>
               <a:spcAft>
-                <a:spcPts val="200"/>
+                <a:spcPts val="1000"/>
               </a:spcAft>
               <a:defRPr sz="2000" b="0">
                 <a:solidFill>
                   <a:srgbClr val="333333"/>
                 </a:solidFill>
-                <a:latin typeface="Consolas"/>
-              </a:defRPr>
-            </a:pPr>
-            <a:r>
-              <a:t>$ ./scripts/module2.sh --run</a:t>
-            </a:r>
-          </a:p>
-        </p:txBody>
-      </p:sp>
-      <p:pic>
-        <p:nvPicPr>
-          <p:cNvPr id="4" name="Picture 3" descr="ex01_uvm_smoke.png"/>
-          <p:cNvPicPr>
-            <a:picLocks noChangeAspect="1"/>
-          </p:cNvPicPr>
-          <p:nvPr/>
-        </p:nvPicPr>
-        <p:blipFill>
-          <a:blip r:embed="rId2"/>
-          <a:stretch>
-            <a:fillRect/>
-          </a:stretch>
-        </p:blipFill>
-        <p:spPr>
-          <a:xfrm>
-            <a:off x="548640" y="1965960"/>
-            <a:ext cx="7071358" cy="3977639"/>
-          </a:xfrm>
-          <a:prstGeom prst="rect">
-            <a:avLst/>
-          </a:prstGeom>
-        </p:spPr>
-      </p:pic>
-      <p:sp>
-        <p:nvSpPr>
-          <p:cNvPr id="5" name="TextBox 4"/>
+                <a:latin typeface="Calibri"/>
+              </a:defRPr>
+            </a:pPr>
+            <a:r>
+              <a:t>• Fixed sequence: 0x00, 0x01, 0x55, 0xAA, 0xFF —</a:t>
+            </a:r>
+          </a:p>
+          <a:p>
+            <a:pPr>
+              <a:lnSpc>
+                <a:spcPts val="2200"/>
+              </a:lnSpc>
+              <a:spcAft>
+                <a:spcPts val="1000"/>
+              </a:spcAft>
+              <a:defRPr sz="2000" b="0">
+                <a:solidFill>
+                  <a:srgbClr val="333333"/>
+                </a:solidFill>
+                <a:latin typeface="Calibri"/>
+              </a:defRPr>
+            </a:pPr>
+            <a:r>
+              <a:t>      repeatable, easy to debug.</a:t>
+            </a:r>
+          </a:p>
+          <a:p>
+            <a:pPr>
+              <a:lnSpc>
+                <a:spcPts val="2200"/>
+              </a:lnSpc>
+              <a:spcAft>
+                <a:spcPts val="1000"/>
+              </a:spcAft>
+              <a:defRPr sz="2000" b="0">
+                <a:solidFill>
+                  <a:srgbClr val="333333"/>
+                </a:solidFill>
+                <a:latin typeface="Calibri"/>
+              </a:defRPr>
+            </a:pPr>
+            <a:r>
+              <a:t>• Pass criteria: scoreboard reports matches, zero</a:t>
+            </a:r>
+          </a:p>
+          <a:p>
+            <a:pPr>
+              <a:lnSpc>
+                <a:spcPts val="2200"/>
+              </a:lnSpc>
+              <a:spcAft>
+                <a:spcPts val="1000"/>
+              </a:spcAft>
+              <a:defRPr sz="2000" b="0">
+                <a:solidFill>
+                  <a:srgbClr val="333333"/>
+                </a:solidFill>
+                <a:latin typeface="Calibri"/>
+              </a:defRPr>
+            </a:pPr>
+            <a:r>
+              <a:t>      mismatches.</a:t>
+            </a:r>
+          </a:p>
+        </p:txBody>
+      </p:sp>
+      <p:sp>
+        <p:nvSpPr>
+          <p:cNvPr id="4" name="TextBox 3"/>
           <p:cNvSpPr txBox="1"/>
           <p:nvPr/>
         </p:nvSpPr>
@@ -5381,8 +6254,8 @@
         </p:nvSpPr>
         <p:spPr>
           <a:xfrm>
-            <a:off x="548640" y="2743200"/>
-            <a:ext cx="11064240" cy="1371600"/>
+            <a:off x="548640" y="411480"/>
+            <a:ext cx="11064240" cy="777240"/>
           </a:xfrm>
           <a:prstGeom prst="rect">
             <a:avLst/>
@@ -5395,11 +6268,11 @@
           </a:bodyPr>
           <a:lstStyle/>
           <a:p>
-            <a:pPr algn="ctr">
-              <a:lnSpc>
-                <a:spcPts val="2200"/>
-              </a:lnSpc>
-              <a:defRPr sz="3600" b="1">
+            <a:pPr>
+              <a:lnSpc>
+                <a:spcPts val="2200"/>
+              </a:lnSpc>
+              <a:defRPr sz="2800" b="1">
                 <a:solidFill>
                   <a:srgbClr val="1A1A2E"/>
                 </a:solidFill>
@@ -5407,7 +6280,7 @@
               </a:defRPr>
             </a:pPr>
             <a:r>
-              <a:t>Practice &amp; assessment</a:t>
+              <a:t>3. Skills you reuse on UART/SPI/I²C</a:t>
             </a:r>
           </a:p>
         </p:txBody>
@@ -5415,6 +6288,105 @@
       <p:sp>
         <p:nvSpPr>
           <p:cNvPr id="3" name="TextBox 2"/>
+          <p:cNvSpPr txBox="1"/>
+          <p:nvPr/>
+        </p:nvSpPr>
+        <p:spPr>
+          <a:xfrm>
+            <a:off x="548640" y="1234440"/>
+            <a:ext cx="11064240" cy="4937760"/>
+          </a:xfrm>
+          <a:prstGeom prst="rect">
+            <a:avLst/>
+          </a:prstGeom>
+          <a:noFill/>
+        </p:spPr>
+        <p:txBody>
+          <a:bodyPr wrap="square">
+            <a:noAutofit/>
+          </a:bodyPr>
+          <a:lstStyle/>
+          <a:p>
+            <a:pPr>
+              <a:lnSpc>
+                <a:spcPts val="2200"/>
+              </a:lnSpc>
+              <a:spcAft>
+                <a:spcPts val="1000"/>
+              </a:spcAft>
+              <a:defRPr sz="2000" b="0">
+                <a:solidFill>
+                  <a:srgbClr val="333333"/>
+                </a:solidFill>
+                <a:latin typeface="Calibri"/>
+              </a:defRPr>
+            </a:pPr>
+            <a:r>
+              <a:t>• Same agent pattern; only the transaction and</a:t>
+            </a:r>
+          </a:p>
+          <a:p>
+            <a:pPr>
+              <a:lnSpc>
+                <a:spcPts val="2200"/>
+              </a:lnSpc>
+              <a:spcAft>
+                <a:spcPts val="1000"/>
+              </a:spcAft>
+              <a:defRPr sz="2000" b="0">
+                <a:solidFill>
+                  <a:srgbClr val="333333"/>
+                </a:solidFill>
+                <a:latin typeface="Calibri"/>
+              </a:defRPr>
+            </a:pPr>
+            <a:r>
+              <a:t>      protocol timing in driver/monitor change.</a:t>
+            </a:r>
+          </a:p>
+          <a:p>
+            <a:pPr>
+              <a:lnSpc>
+                <a:spcPts val="2200"/>
+              </a:lnSpc>
+              <a:spcAft>
+                <a:spcPts val="1000"/>
+              </a:spcAft>
+              <a:defRPr sz="2000" b="0">
+                <a:solidFill>
+                  <a:srgbClr val="333333"/>
+                </a:solidFill>
+                <a:latin typeface="Calibri"/>
+              </a:defRPr>
+            </a:pPr>
+            <a:r>
+              <a:t>• Read UVM log lines: DRIVER, MONITOR, SCOREBOARD,</a:t>
+            </a:r>
+          </a:p>
+          <a:p>
+            <a:pPr>
+              <a:lnSpc>
+                <a:spcPts val="2200"/>
+              </a:lnSpc>
+              <a:spcAft>
+                <a:spcPts val="1000"/>
+              </a:spcAft>
+              <a:defRPr sz="2000" b="0">
+                <a:solidFill>
+                  <a:srgbClr val="333333"/>
+                </a:solidFill>
+                <a:latin typeface="Calibri"/>
+              </a:defRPr>
+            </a:pPr>
+            <a:r>
+              <a:t>      final summary.</a:t>
+            </a:r>
+          </a:p>
+        </p:txBody>
+      </p:sp>
+      <p:sp>
+        <p:nvSpPr>
+          <p:cNvPr id="4" name="TextBox 3"/>
           <p:cNvSpPr txBox="1"/>
           <p:nvPr/>
         </p:nvSpPr>
@@ -5477,8 +6449,8 @@
         </p:nvSpPr>
         <p:spPr>
           <a:xfrm>
-            <a:off x="548640" y="411480"/>
-            <a:ext cx="11064240" cy="777240"/>
+            <a:off x="548640" y="2743200"/>
+            <a:ext cx="11064240" cy="1371600"/>
           </a:xfrm>
           <a:prstGeom prst="rect">
             <a:avLst/>
@@ -5491,11 +6463,11 @@
           </a:bodyPr>
           <a:lstStyle/>
           <a:p>
-            <a:pPr>
-              <a:lnSpc>
-                <a:spcPts val="2200"/>
-              </a:lnSpc>
-              <a:defRPr sz="2800" b="1">
+            <a:pPr algn="ctr">
+              <a:lnSpc>
+                <a:spcPts val="2200"/>
+              </a:lnSpc>
+              <a:defRPr sz="3600" b="1">
                 <a:solidFill>
                   <a:srgbClr val="1A1A2E"/>
                 </a:solidFill>
@@ -5503,7 +6475,7 @@
               </a:defRPr>
             </a:pPr>
             <a:r>
-              <a:t>Exercises</a:t>
+              <a:t>Syllabus topics</a:t>
             </a:r>
           </a:p>
         </p:txBody>
@@ -5511,105 +6483,6 @@
       <p:sp>
         <p:nvSpPr>
           <p:cNvPr id="3" name="TextBox 2"/>
-          <p:cNvSpPr txBox="1"/>
-          <p:nvPr/>
-        </p:nvSpPr>
-        <p:spPr>
-          <a:xfrm>
-            <a:off x="548640" y="1234440"/>
-            <a:ext cx="11064240" cy="4937760"/>
-          </a:xfrm>
-          <a:prstGeom prst="rect">
-            <a:avLst/>
-          </a:prstGeom>
-          <a:noFill/>
-        </p:spPr>
-        <p:txBody>
-          <a:bodyPr wrap="square">
-            <a:noAutofit/>
-          </a:bodyPr>
-          <a:lstStyle/>
-          <a:p>
-            <a:pPr>
-              <a:lnSpc>
-                <a:spcPts val="2200"/>
-              </a:lnSpc>
-              <a:spcAft>
-                <a:spcPts val="1000"/>
-              </a:spcAft>
-              <a:defRPr sz="2000" b="0">
-                <a:solidFill>
-                  <a:srgbClr val="333333"/>
-                </a:solidFill>
-                <a:latin typeface="Calibri"/>
-              </a:defRPr>
-            </a:pPr>
-            <a:r>
-              <a:t>• Run uvm_smoke</a:t>
-            </a:r>
-          </a:p>
-          <a:p>
-            <a:pPr>
-              <a:lnSpc>
-                <a:spcPts val="2200"/>
-              </a:lnSpc>
-              <a:spcAft>
-                <a:spcPts val="1000"/>
-              </a:spcAft>
-              <a:defRPr sz="2000" b="0">
-                <a:solidFill>
-                  <a:srgbClr val="333333"/>
-                </a:solidFill>
-                <a:latin typeface="Calibri"/>
-              </a:defRPr>
-            </a:pPr>
-            <a:r>
-              <a:t>• Traceability</a:t>
-            </a:r>
-          </a:p>
-          <a:p>
-            <a:pPr>
-              <a:lnSpc>
-                <a:spcPts val="2200"/>
-              </a:lnSpc>
-              <a:spcAft>
-                <a:spcPts val="1000"/>
-              </a:spcAft>
-              <a:defRPr sz="2000" b="0">
-                <a:solidFill>
-                  <a:srgbClr val="333333"/>
-                </a:solidFill>
-                <a:latin typeface="Calibri"/>
-              </a:defRPr>
-            </a:pPr>
-            <a:r>
-              <a:t>• Change the sequence</a:t>
-            </a:r>
-          </a:p>
-          <a:p>
-            <a:pPr>
-              <a:lnSpc>
-                <a:spcPts val="2200"/>
-              </a:lnSpc>
-              <a:spcAft>
-                <a:spcPts val="1000"/>
-              </a:spcAft>
-              <a:defRPr sz="2000" b="0">
-                <a:solidFill>
-                  <a:srgbClr val="333333"/>
-                </a:solidFill>
-                <a:latin typeface="Calibri"/>
-              </a:defRPr>
-            </a:pPr>
-            <a:r>
-              <a:t>• Optional: Waveforms</a:t>
-            </a:r>
-          </a:p>
-        </p:txBody>
-      </p:sp>
-      <p:sp>
-        <p:nvSpPr>
-          <p:cNvPr id="4" name="TextBox 3"/>
           <p:cNvSpPr txBox="1"/>
           <p:nvPr/>
         </p:nvSpPr>
@@ -5931,7 +6804,7 @@
               </a:defRPr>
             </a:pPr>
             <a:r>
-              <a:t>Assessment checklist</a:t>
+              <a:t>1. Basic Testbench (Directed Tests, Pin Wiggling)</a:t>
             </a:r>
           </a:p>
         </p:txBody>
@@ -5973,7 +6846,7 @@
               </a:defRPr>
             </a:pPr>
             <a:r>
-              <a:t>• Can explain basic TB vs UVM (transaction, sequence,</a:t>
+              <a:t>• Directed test: Drive specific inputs (e.g., reset,</a:t>
             </a:r>
           </a:p>
           <a:p>
@@ -5992,7 +6865,7 @@
               </a:defRPr>
             </a:pPr>
             <a:r>
-              <a:t>      driver, monitor, scoreboard).</a:t>
+              <a:t>      then a fixed sequence of data) and check expecte…</a:t>
             </a:r>
           </a:p>
           <a:p>
@@ -6011,7 +6884,7 @@
               </a:defRPr>
             </a:pPr>
             <a:r>
-              <a:t>• Can describe the role of UVM_HOME, Verilator flags,</a:t>
+              <a:t>• Pin wiggling: The testbench directly drives and</a:t>
             </a:r>
           </a:p>
           <a:p>
@@ -6030,64 +6903,7 @@
               </a:defRPr>
             </a:pPr>
             <a:r>
-              <a:t>      and Make in building/running a UVM test.</a:t>
-            </a:r>
-          </a:p>
-          <a:p>
-            <a:pPr>
-              <a:lnSpc>
-                <a:spcPts val="2200"/>
-              </a:lnSpc>
-              <a:spcAft>
-                <a:spcPts val="1000"/>
-              </a:spcAft>
-              <a:defRPr sz="2000" b="0">
-                <a:solidFill>
-                  <a:srgbClr val="333333"/>
-                </a:solidFill>
-                <a:latin typeface="Calibri"/>
-              </a:defRPr>
-            </a:pPr>
-            <a:r>
-              <a:t>• Can run uvm_smoke and interpret the output.</a:t>
-            </a:r>
-          </a:p>
-          <a:p>
-            <a:pPr>
-              <a:lnSpc>
-                <a:spcPts val="2200"/>
-              </a:lnSpc>
-              <a:spcAft>
-                <a:spcPts val="1000"/>
-              </a:spcAft>
-              <a:defRPr sz="2000" b="0">
-                <a:solidFill>
-                  <a:srgbClr val="333333"/>
-                </a:solidFill>
-                <a:latin typeface="Calibri"/>
-              </a:defRPr>
-            </a:pPr>
-            <a:r>
-              <a:t>• Ready to move to Module 3 (UART protocol + RTL +</a:t>
-            </a:r>
-          </a:p>
-          <a:p>
-            <a:pPr>
-              <a:lnSpc>
-                <a:spcPts val="2200"/>
-              </a:lnSpc>
-              <a:spcAft>
-                <a:spcPts val="1000"/>
-              </a:spcAft>
-              <a:defRPr sz="2000" b="0">
-                <a:solidFill>
-                  <a:srgbClr val="333333"/>
-                </a:solidFill>
-                <a:latin typeface="Calibri"/>
-              </a:defRPr>
-            </a:pPr>
-            <a:r>
-              <a:t>      basic testbench).</a:t>
+              <a:t>      samples DUT pins (clock, reset, data, enable) — no…</a:t>
             </a:r>
           </a:p>
         </p:txBody>
@@ -6183,7 +6999,7 @@
               </a:defRPr>
             </a:pPr>
             <a:r>
-              <a:t>Summary &amp; next steps</a:t>
+              <a:t>2. Evolution to UVM+SV Testbench</a:t>
             </a:r>
           </a:p>
         </p:txBody>
@@ -6225,7 +7041,7 @@
               </a:defRPr>
             </a:pPr>
             <a:r>
-              <a:t>• Understand basic testbench patterns (directed tests,</a:t>
+              <a:t>• Sequence: Produces a stream of transactions (e.g., a</a:t>
             </a:r>
           </a:p>
           <a:p>
@@ -6244,7 +7060,7 @@
               </a:defRPr>
             </a:pPr>
             <a:r>
-              <a:t>      pin wiggling), the evolution to a UVM+SV testb…</a:t>
+              <a:t>      few directed values: 0x00, 0x01, 0x55, 0xAA, 0…</a:t>
             </a:r>
           </a:p>
           <a:p>
@@ -6263,7 +7079,7 @@
               </a:defRPr>
             </a:pPr>
             <a:r>
-              <a:t>• Complete module2/CHECKLIST.md</a:t>
+              <a:t>• Driver: Gets transactions from the sequencer and</a:t>
             </a:r>
           </a:p>
           <a:p>
@@ -6282,7 +7098,7 @@
               </a:defRPr>
             </a:pPr>
             <a:r>
-              <a:t>• Run ./scripts/module2.sh --check</a:t>
+              <a:t>      drives the DUT interface (e.g., set enable and d o…</a:t>
             </a:r>
           </a:p>
           <a:p>
@@ -6301,7 +7117,1264 @@
               </a:defRPr>
             </a:pPr>
             <a:r>
-              <a:t>• Next: UART</a:t>
+              <a:t>• Monitor: Observes the DUT interface and turns pin</a:t>
+            </a:r>
+          </a:p>
+          <a:p>
+            <a:pPr>
+              <a:lnSpc>
+                <a:spcPts val="2200"/>
+              </a:lnSpc>
+              <a:spcAft>
+                <a:spcPts val="1000"/>
+              </a:spcAft>
+              <a:defRPr sz="2000" b="0">
+                <a:solidFill>
+                  <a:srgbClr val="333333"/>
+                </a:solidFill>
+                <a:latin typeface="Calibri"/>
+              </a:defRPr>
+            </a:pPr>
+            <a:r>
+              <a:t>      activity into transactions, then sends them to th…</a:t>
+            </a:r>
+          </a:p>
+          <a:p>
+            <a:pPr>
+              <a:lnSpc>
+                <a:spcPts val="2200"/>
+              </a:lnSpc>
+              <a:spcAft>
+                <a:spcPts val="1000"/>
+              </a:spcAft>
+              <a:defRPr sz="2000" b="0">
+                <a:solidFill>
+                  <a:srgbClr val="333333"/>
+                </a:solidFill>
+                <a:latin typeface="Calibri"/>
+              </a:defRPr>
+            </a:pPr>
+            <a:r>
+              <a:t>• Scoreboard: Compares “expected” (what we sent) vs</a:t>
+            </a:r>
+          </a:p>
+          <a:p>
+            <a:pPr>
+              <a:lnSpc>
+                <a:spcPts val="2200"/>
+              </a:lnSpc>
+              <a:spcAft>
+                <a:spcPts val="1000"/>
+              </a:spcAft>
+              <a:defRPr sz="2000" b="0">
+                <a:solidFill>
+                  <a:srgbClr val="333333"/>
+                </a:solidFill>
+                <a:latin typeface="Calibri"/>
+              </a:defRPr>
+            </a:pPr>
+            <a:r>
+              <a:t>      “observed” (what the monitor saw). Reports matche…</a:t>
+            </a:r>
+          </a:p>
+          <a:p>
+            <a:pPr>
+              <a:lnSpc>
+                <a:spcPts val="2200"/>
+              </a:lnSpc>
+              <a:spcAft>
+                <a:spcPts val="1000"/>
+              </a:spcAft>
+              <a:defRPr sz="2000" b="0">
+                <a:solidFill>
+                  <a:srgbClr val="333333"/>
+                </a:solidFill>
+                <a:latin typeface="Calibri"/>
+              </a:defRPr>
+            </a:pPr>
+            <a:r>
+              <a:t>• Agent: Groups driver, monitor, and sequencer for one</a:t>
+            </a:r>
+          </a:p>
+          <a:p>
+            <a:pPr>
+              <a:lnSpc>
+                <a:spcPts val="2200"/>
+              </a:lnSpc>
+              <a:spcAft>
+                <a:spcPts val="1000"/>
+              </a:spcAft>
+              <a:defRPr sz="2000" b="0">
+                <a:solidFill>
+                  <a:srgbClr val="333333"/>
+                </a:solidFill>
+                <a:latin typeface="Calibri"/>
+              </a:defRPr>
+            </a:pPr>
+            <a:r>
+              <a:t>      interface. Env: Contains agent(s) and scoreboa…</a:t>
+            </a:r>
+          </a:p>
+        </p:txBody>
+      </p:sp>
+      <p:sp>
+        <p:nvSpPr>
+          <p:cNvPr id="4" name="TextBox 3"/>
+          <p:cNvSpPr txBox="1"/>
+          <p:nvPr/>
+        </p:nvSpPr>
+        <p:spPr>
+          <a:xfrm>
+            <a:off x="548640" y="6355080"/>
+            <a:ext cx="11064240" cy="320040"/>
+          </a:xfrm>
+          <a:prstGeom prst="rect">
+            <a:avLst/>
+          </a:prstGeom>
+          <a:noFill/>
+        </p:spPr>
+        <p:txBody>
+          <a:bodyPr wrap="square">
+            <a:noAutofit/>
+          </a:bodyPr>
+          <a:lstStyle/>
+          <a:p>
+            <a:pPr algn="r">
+              <a:lnSpc>
+                <a:spcPts val="2200"/>
+              </a:lnSpc>
+              <a:defRPr sz="1000" b="0">
+                <a:solidFill>
+                  <a:srgbClr val="666666"/>
+                </a:solidFill>
+                <a:latin typeface="Calibri"/>
+              </a:defRPr>
+            </a:pPr>
+            <a:r>
+              <a:t>learn_uart_spi_i2c / Module 2</a:t>
+            </a:r>
+          </a:p>
+        </p:txBody>
+      </p:sp>
+    </p:spTree>
+  </p:cSld>
+  <p:clrMapOvr>
+    <a:masterClrMapping/>
+  </p:clrMapOvr>
+</p:sld>
+</file>
+
+<file path=ppt/slides/slide22.xml><?xml version="1.0" encoding="utf-8"?>
+<p:sld xmlns:a="http://schemas.openxmlformats.org/drawingml/2006/main" xmlns:p="http://schemas.openxmlformats.org/presentationml/2006/main" xmlns:r="http://schemas.openxmlformats.org/officeDocument/2006/relationships">
+  <p:cSld>
+    <p:spTree>
+      <p:nvGrpSpPr>
+        <p:cNvPr id="1" name=""/>
+        <p:cNvGrpSpPr/>
+        <p:nvPr/>
+      </p:nvGrpSpPr>
+      <p:grpSpPr/>
+      <p:sp>
+        <p:nvSpPr>
+          <p:cNvPr id="2" name="TextBox 1"/>
+          <p:cNvSpPr txBox="1"/>
+          <p:nvPr/>
+        </p:nvSpPr>
+        <p:spPr>
+          <a:xfrm>
+            <a:off x="548640" y="411480"/>
+            <a:ext cx="11064240" cy="777240"/>
+          </a:xfrm>
+          <a:prstGeom prst="rect">
+            <a:avLst/>
+          </a:prstGeom>
+          <a:noFill/>
+        </p:spPr>
+        <p:txBody>
+          <a:bodyPr wrap="square">
+            <a:noAutofit/>
+          </a:bodyPr>
+          <a:lstStyle/>
+          <a:p>
+            <a:pPr>
+              <a:lnSpc>
+                <a:spcPts val="2200"/>
+              </a:lnSpc>
+              <a:defRPr sz="2800" b="1">
+                <a:solidFill>
+                  <a:srgbClr val="1A1A2E"/>
+                </a:solidFill>
+                <a:latin typeface="Calibri"/>
+              </a:defRPr>
+            </a:pPr>
+            <a:r>
+              <a:t>3. Toolchain (Verilator, UVM_HOME, Make)</a:t>
+            </a:r>
+          </a:p>
+        </p:txBody>
+      </p:sp>
+      <p:sp>
+        <p:nvSpPr>
+          <p:cNvPr id="3" name="TextBox 2"/>
+          <p:cNvSpPr txBox="1"/>
+          <p:nvPr/>
+        </p:nvSpPr>
+        <p:spPr>
+          <a:xfrm>
+            <a:off x="548640" y="1234440"/>
+            <a:ext cx="11064240" cy="4937760"/>
+          </a:xfrm>
+          <a:prstGeom prst="rect">
+            <a:avLst/>
+          </a:prstGeom>
+          <a:noFill/>
+        </p:spPr>
+        <p:txBody>
+          <a:bodyPr wrap="square">
+            <a:noAutofit/>
+          </a:bodyPr>
+          <a:lstStyle/>
+          <a:p>
+            <a:pPr>
+              <a:lnSpc>
+                <a:spcPts val="2200"/>
+              </a:lnSpc>
+              <a:spcAft>
+                <a:spcPts val="1000"/>
+              </a:spcAft>
+              <a:defRPr sz="2000" b="0">
+                <a:solidFill>
+                  <a:srgbClr val="333333"/>
+                </a:solidFill>
+                <a:latin typeface="Calibri"/>
+              </a:defRPr>
+            </a:pPr>
+            <a:r>
+              <a:t>• Verilator: Compiles SystemVerilog (including UVM) +</a:t>
+            </a:r>
+          </a:p>
+          <a:p>
+            <a:pPr>
+              <a:lnSpc>
+                <a:spcPts val="2200"/>
+              </a:lnSpc>
+              <a:spcAft>
+                <a:spcPts val="1000"/>
+              </a:spcAft>
+              <a:defRPr sz="2000" b="0">
+                <a:solidFill>
+                  <a:srgbClr val="333333"/>
+                </a:solidFill>
+                <a:latin typeface="Calibri"/>
+              </a:defRPr>
+            </a:pPr>
+            <a:r>
+              <a:t>      C++ into an executable. Key flags: `-sv`, `--ti…</a:t>
+            </a:r>
+          </a:p>
+          <a:p>
+            <a:pPr>
+              <a:lnSpc>
+                <a:spcPts val="2200"/>
+              </a:lnSpc>
+              <a:spcAft>
+                <a:spcPts val="1000"/>
+              </a:spcAft>
+              <a:defRPr sz="2000" b="0">
+                <a:solidFill>
+                  <a:srgbClr val="333333"/>
+                </a:solidFill>
+                <a:latin typeface="Calibri"/>
+              </a:defRPr>
+            </a:pPr>
+            <a:r>
+              <a:t>• UVM_HOME: Points to the UVM library root; the build</a:t>
+            </a:r>
+          </a:p>
+          <a:p>
+            <a:pPr>
+              <a:lnSpc>
+                <a:spcPts val="2200"/>
+              </a:lnSpc>
+              <a:spcAft>
+                <a:spcPts val="1000"/>
+              </a:spcAft>
+              <a:defRPr sz="2000" b="0">
+                <a:solidFill>
+                  <a:srgbClr val="333333"/>
+                </a:solidFill>
+                <a:latin typeface="Calibri"/>
+              </a:defRPr>
+            </a:pPr>
+            <a:r>
+              <a:t>      uses `$(UVM_HOME)/src/uvm_pkg.sv` and `+incdir+…</a:t>
+            </a:r>
+          </a:p>
+          <a:p>
+            <a:pPr>
+              <a:lnSpc>
+                <a:spcPts val="2200"/>
+              </a:lnSpc>
+              <a:spcAft>
+                <a:spcPts val="1000"/>
+              </a:spcAft>
+              <a:defRPr sz="2000" b="0">
+                <a:solidFill>
+                  <a:srgbClr val="333333"/>
+                </a:solidFill>
+                <a:latin typeface="Calibri"/>
+              </a:defRPr>
+            </a:pPr>
+            <a:r>
+              <a:t>• Make: One target to compile (Verilator + make in</a:t>
+            </a:r>
+          </a:p>
+          <a:p>
+            <a:pPr>
+              <a:lnSpc>
+                <a:spcPts val="2200"/>
+              </a:lnSpc>
+              <a:spcAft>
+                <a:spcPts val="1000"/>
+              </a:spcAft>
+              <a:defRPr sz="2000" b="0">
+                <a:solidFill>
+                  <a:srgbClr val="333333"/>
+                </a:solidFill>
+                <a:latin typeface="Calibri"/>
+              </a:defRPr>
+            </a:pPr>
+            <a:r>
+              <a:t>      obj_dir), one to run (`./obj_dir/Vtest_uvm_smoke +…</a:t>
+            </a:r>
+          </a:p>
+        </p:txBody>
+      </p:sp>
+      <p:sp>
+        <p:nvSpPr>
+          <p:cNvPr id="4" name="TextBox 3"/>
+          <p:cNvSpPr txBox="1"/>
+          <p:nvPr/>
+        </p:nvSpPr>
+        <p:spPr>
+          <a:xfrm>
+            <a:off x="548640" y="6355080"/>
+            <a:ext cx="11064240" cy="320040"/>
+          </a:xfrm>
+          <a:prstGeom prst="rect">
+            <a:avLst/>
+          </a:prstGeom>
+          <a:noFill/>
+        </p:spPr>
+        <p:txBody>
+          <a:bodyPr wrap="square">
+            <a:noAutofit/>
+          </a:bodyPr>
+          <a:lstStyle/>
+          <a:p>
+            <a:pPr algn="r">
+              <a:lnSpc>
+                <a:spcPts val="2200"/>
+              </a:lnSpc>
+              <a:defRPr sz="1000" b="0">
+                <a:solidFill>
+                  <a:srgbClr val="666666"/>
+                </a:solidFill>
+                <a:latin typeface="Calibri"/>
+              </a:defRPr>
+            </a:pPr>
+            <a:r>
+              <a:t>learn_uart_spi_i2c / Module 2</a:t>
+            </a:r>
+          </a:p>
+        </p:txBody>
+      </p:sp>
+    </p:spTree>
+  </p:cSld>
+  <p:clrMapOvr>
+    <a:masterClrMapping/>
+  </p:clrMapOvr>
+</p:sld>
+</file>
+
+<file path=ppt/slides/slide23.xml><?xml version="1.0" encoding="utf-8"?>
+<p:sld xmlns:a="http://schemas.openxmlformats.org/drawingml/2006/main" xmlns:p="http://schemas.openxmlformats.org/presentationml/2006/main" xmlns:r="http://schemas.openxmlformats.org/officeDocument/2006/relationships">
+  <p:cSld>
+    <p:spTree>
+      <p:nvGrpSpPr>
+        <p:cNvPr id="1" name=""/>
+        <p:cNvGrpSpPr/>
+        <p:nvPr/>
+      </p:nvGrpSpPr>
+      <p:grpSpPr/>
+      <p:sp>
+        <p:nvSpPr>
+          <p:cNvPr id="2" name="TextBox 1"/>
+          <p:cNvSpPr txBox="1"/>
+          <p:nvPr/>
+        </p:nvSpPr>
+        <p:spPr>
+          <a:xfrm>
+            <a:off x="548640" y="2743200"/>
+            <a:ext cx="11064240" cy="1371600"/>
+          </a:xfrm>
+          <a:prstGeom prst="rect">
+            <a:avLst/>
+          </a:prstGeom>
+          <a:noFill/>
+        </p:spPr>
+        <p:txBody>
+          <a:bodyPr wrap="square">
+            <a:noAutofit/>
+          </a:bodyPr>
+          <a:lstStyle/>
+          <a:p>
+            <a:pPr algn="ctr">
+              <a:lnSpc>
+                <a:spcPts val="2200"/>
+              </a:lnSpc>
+              <a:defRPr sz="3600" b="1">
+                <a:solidFill>
+                  <a:srgbClr val="1A1A2E"/>
+                </a:solidFill>
+                <a:latin typeface="Calibri"/>
+              </a:defRPr>
+            </a:pPr>
+            <a:r>
+              <a:t>Command reference highlights</a:t>
+            </a:r>
+          </a:p>
+        </p:txBody>
+      </p:sp>
+      <p:sp>
+        <p:nvSpPr>
+          <p:cNvPr id="3" name="TextBox 2"/>
+          <p:cNvSpPr txBox="1"/>
+          <p:nvPr/>
+        </p:nvSpPr>
+        <p:spPr>
+          <a:xfrm>
+            <a:off x="548640" y="6355080"/>
+            <a:ext cx="11064240" cy="320040"/>
+          </a:xfrm>
+          <a:prstGeom prst="rect">
+            <a:avLst/>
+          </a:prstGeom>
+          <a:noFill/>
+        </p:spPr>
+        <p:txBody>
+          <a:bodyPr wrap="square">
+            <a:noAutofit/>
+          </a:bodyPr>
+          <a:lstStyle/>
+          <a:p>
+            <a:pPr algn="r">
+              <a:lnSpc>
+                <a:spcPts val="2200"/>
+              </a:lnSpc>
+              <a:defRPr sz="1000" b="0">
+                <a:solidFill>
+                  <a:srgbClr val="666666"/>
+                </a:solidFill>
+                <a:latin typeface="Calibri"/>
+              </a:defRPr>
+            </a:pPr>
+            <a:r>
+              <a:t>learn_uart_spi_i2c / Module 2</a:t>
+            </a:r>
+          </a:p>
+        </p:txBody>
+      </p:sp>
+    </p:spTree>
+  </p:cSld>
+  <p:clrMapOvr>
+    <a:masterClrMapping/>
+  </p:clrMapOvr>
+</p:sld>
+</file>
+
+<file path=ppt/slides/slide24.xml><?xml version="1.0" encoding="utf-8"?>
+<p:sld xmlns:a="http://schemas.openxmlformats.org/drawingml/2006/main" xmlns:p="http://schemas.openxmlformats.org/presentationml/2006/main" xmlns:r="http://schemas.openxmlformats.org/officeDocument/2006/relationships">
+  <p:cSld>
+    <p:spTree>
+      <p:nvGrpSpPr>
+        <p:cNvPr id="1" name=""/>
+        <p:cNvGrpSpPr/>
+        <p:nvPr/>
+      </p:nvGrpSpPr>
+      <p:grpSpPr/>
+      <p:sp>
+        <p:nvSpPr>
+          <p:cNvPr id="2" name="TextBox 1"/>
+          <p:cNvSpPr txBox="1"/>
+          <p:nvPr/>
+        </p:nvSpPr>
+        <p:spPr>
+          <a:xfrm>
+            <a:off x="548640" y="411480"/>
+            <a:ext cx="11064240" cy="777240"/>
+          </a:xfrm>
+          <a:prstGeom prst="rect">
+            <a:avLst/>
+          </a:prstGeom>
+          <a:noFill/>
+        </p:spPr>
+        <p:txBody>
+          <a:bodyPr wrap="square">
+            <a:noAutofit/>
+          </a:bodyPr>
+          <a:lstStyle/>
+          <a:p>
+            <a:pPr>
+              <a:lnSpc>
+                <a:spcPts val="2200"/>
+              </a:lnSpc>
+              <a:defRPr sz="2800" b="1">
+                <a:solidFill>
+                  <a:srgbClr val="1A1A2E"/>
+                </a:solidFill>
+                <a:latin typeface="Calibri"/>
+              </a:defRPr>
+            </a:pPr>
+            <a:r>
+              <a:t>Environment checks</a:t>
+            </a:r>
+          </a:p>
+        </p:txBody>
+      </p:sp>
+      <p:sp>
+        <p:nvSpPr>
+          <p:cNvPr id="3" name="TextBox 2"/>
+          <p:cNvSpPr txBox="1"/>
+          <p:nvPr/>
+        </p:nvSpPr>
+        <p:spPr>
+          <a:xfrm>
+            <a:off x="548640" y="1234440"/>
+            <a:ext cx="11064240" cy="4937760"/>
+          </a:xfrm>
+          <a:prstGeom prst="rect">
+            <a:avLst/>
+          </a:prstGeom>
+          <a:noFill/>
+        </p:spPr>
+        <p:txBody>
+          <a:bodyPr wrap="square">
+            <a:noAutofit/>
+          </a:bodyPr>
+          <a:lstStyle/>
+          <a:p>
+            <a:pPr>
+              <a:lnSpc>
+                <a:spcPts val="2200"/>
+              </a:lnSpc>
+              <a:spcAft>
+                <a:spcPts val="1000"/>
+              </a:spcAft>
+              <a:defRPr sz="2000" b="0">
+                <a:solidFill>
+                  <a:srgbClr val="333333"/>
+                </a:solidFill>
+                <a:latin typeface="Calibri"/>
+              </a:defRPr>
+            </a:pPr>
+            <a:r>
+              <a:t>• verilator --version</a:t>
+            </a:r>
+          </a:p>
+        </p:txBody>
+      </p:sp>
+      <p:sp>
+        <p:nvSpPr>
+          <p:cNvPr id="4" name="TextBox 3"/>
+          <p:cNvSpPr txBox="1"/>
+          <p:nvPr/>
+        </p:nvSpPr>
+        <p:spPr>
+          <a:xfrm>
+            <a:off x="548640" y="6355080"/>
+            <a:ext cx="11064240" cy="320040"/>
+          </a:xfrm>
+          <a:prstGeom prst="rect">
+            <a:avLst/>
+          </a:prstGeom>
+          <a:noFill/>
+        </p:spPr>
+        <p:txBody>
+          <a:bodyPr wrap="square">
+            <a:noAutofit/>
+          </a:bodyPr>
+          <a:lstStyle/>
+          <a:p>
+            <a:pPr algn="r">
+              <a:lnSpc>
+                <a:spcPts val="2200"/>
+              </a:lnSpc>
+              <a:defRPr sz="1000" b="0">
+                <a:solidFill>
+                  <a:srgbClr val="666666"/>
+                </a:solidFill>
+                <a:latin typeface="Calibri"/>
+              </a:defRPr>
+            </a:pPr>
+            <a:r>
+              <a:t>learn_uart_spi_i2c / Module 2</a:t>
+            </a:r>
+          </a:p>
+        </p:txBody>
+      </p:sp>
+    </p:spTree>
+  </p:cSld>
+  <p:clrMapOvr>
+    <a:masterClrMapping/>
+  </p:clrMapOvr>
+</p:sld>
+</file>
+
+<file path=ppt/slides/slide25.xml><?xml version="1.0" encoding="utf-8"?>
+<p:sld xmlns:a="http://schemas.openxmlformats.org/drawingml/2006/main" xmlns:p="http://schemas.openxmlformats.org/presentationml/2006/main" xmlns:r="http://schemas.openxmlformats.org/officeDocument/2006/relationships">
+  <p:cSld>
+    <p:spTree>
+      <p:nvGrpSpPr>
+        <p:cNvPr id="1" name=""/>
+        <p:cNvGrpSpPr/>
+        <p:nvPr/>
+      </p:nvGrpSpPr>
+      <p:grpSpPr/>
+      <p:sp>
+        <p:nvSpPr>
+          <p:cNvPr id="2" name="TextBox 1"/>
+          <p:cNvSpPr txBox="1"/>
+          <p:nvPr/>
+        </p:nvSpPr>
+        <p:spPr>
+          <a:xfrm>
+            <a:off x="548640" y="411480"/>
+            <a:ext cx="11064240" cy="777240"/>
+          </a:xfrm>
+          <a:prstGeom prst="rect">
+            <a:avLst/>
+          </a:prstGeom>
+          <a:noFill/>
+        </p:spPr>
+        <p:txBody>
+          <a:bodyPr wrap="square">
+            <a:noAutofit/>
+          </a:bodyPr>
+          <a:lstStyle/>
+          <a:p>
+            <a:pPr>
+              <a:lnSpc>
+                <a:spcPts val="2200"/>
+              </a:lnSpc>
+              <a:defRPr sz="2800" b="1">
+                <a:solidFill>
+                  <a:srgbClr val="1A1A2E"/>
+                </a:solidFill>
+                <a:latin typeface="Calibri"/>
+              </a:defRPr>
+            </a:pPr>
+            <a:r>
+              <a:t>Build and run uvm_smoke</a:t>
+            </a:r>
+          </a:p>
+        </p:txBody>
+      </p:sp>
+      <p:sp>
+        <p:nvSpPr>
+          <p:cNvPr id="3" name="TextBox 2"/>
+          <p:cNvSpPr txBox="1"/>
+          <p:nvPr/>
+        </p:nvSpPr>
+        <p:spPr>
+          <a:xfrm>
+            <a:off x="548640" y="1234440"/>
+            <a:ext cx="11064240" cy="4937760"/>
+          </a:xfrm>
+          <a:prstGeom prst="rect">
+            <a:avLst/>
+          </a:prstGeom>
+          <a:noFill/>
+        </p:spPr>
+        <p:txBody>
+          <a:bodyPr wrap="square">
+            <a:noAutofit/>
+          </a:bodyPr>
+          <a:lstStyle/>
+          <a:p>
+            <a:pPr>
+              <a:lnSpc>
+                <a:spcPts val="2200"/>
+              </a:lnSpc>
+              <a:spcAft>
+                <a:spcPts val="1000"/>
+              </a:spcAft>
+              <a:defRPr sz="2000" b="0">
+                <a:solidFill>
+                  <a:srgbClr val="333333"/>
+                </a:solidFill>
+                <a:latin typeface="Calibri"/>
+              </a:defRPr>
+            </a:pPr>
+            <a:r>
+              <a:t>• cd module2/examples/uvm_smoke</a:t>
+            </a:r>
+          </a:p>
+        </p:txBody>
+      </p:sp>
+      <p:sp>
+        <p:nvSpPr>
+          <p:cNvPr id="4" name="TextBox 3"/>
+          <p:cNvSpPr txBox="1"/>
+          <p:nvPr/>
+        </p:nvSpPr>
+        <p:spPr>
+          <a:xfrm>
+            <a:off x="548640" y="6355080"/>
+            <a:ext cx="11064240" cy="320040"/>
+          </a:xfrm>
+          <a:prstGeom prst="rect">
+            <a:avLst/>
+          </a:prstGeom>
+          <a:noFill/>
+        </p:spPr>
+        <p:txBody>
+          <a:bodyPr wrap="square">
+            <a:noAutofit/>
+          </a:bodyPr>
+          <a:lstStyle/>
+          <a:p>
+            <a:pPr algn="r">
+              <a:lnSpc>
+                <a:spcPts val="2200"/>
+              </a:lnSpc>
+              <a:defRPr sz="1000" b="0">
+                <a:solidFill>
+                  <a:srgbClr val="666666"/>
+                </a:solidFill>
+                <a:latin typeface="Calibri"/>
+              </a:defRPr>
+            </a:pPr>
+            <a:r>
+              <a:t>learn_uart_spi_i2c / Module 2</a:t>
+            </a:r>
+          </a:p>
+        </p:txBody>
+      </p:sp>
+    </p:spTree>
+  </p:cSld>
+  <p:clrMapOvr>
+    <a:masterClrMapping/>
+  </p:clrMapOvr>
+</p:sld>
+</file>
+
+<file path=ppt/slides/slide26.xml><?xml version="1.0" encoding="utf-8"?>
+<p:sld xmlns:a="http://schemas.openxmlformats.org/drawingml/2006/main" xmlns:p="http://schemas.openxmlformats.org/presentationml/2006/main" xmlns:r="http://schemas.openxmlformats.org/officeDocument/2006/relationships">
+  <p:cSld>
+    <p:spTree>
+      <p:nvGrpSpPr>
+        <p:cNvPr id="1" name=""/>
+        <p:cNvGrpSpPr/>
+        <p:nvPr/>
+      </p:nvGrpSpPr>
+      <p:grpSpPr/>
+      <p:sp>
+        <p:nvSpPr>
+          <p:cNvPr id="2" name="TextBox 1"/>
+          <p:cNvSpPr txBox="1"/>
+          <p:nvPr/>
+        </p:nvSpPr>
+        <p:spPr>
+          <a:xfrm>
+            <a:off x="548640" y="411480"/>
+            <a:ext cx="11064240" cy="777240"/>
+          </a:xfrm>
+          <a:prstGeom prst="rect">
+            <a:avLst/>
+          </a:prstGeom>
+          <a:noFill/>
+        </p:spPr>
+        <p:txBody>
+          <a:bodyPr wrap="square">
+            <a:noAutofit/>
+          </a:bodyPr>
+          <a:lstStyle/>
+          <a:p>
+            <a:pPr>
+              <a:lnSpc>
+                <a:spcPts val="2200"/>
+              </a:lnSpc>
+              <a:defRPr sz="2800" b="1">
+                <a:solidFill>
+                  <a:srgbClr val="1A1A2E"/>
+                </a:solidFill>
+                <a:latin typeface="Calibri"/>
+              </a:defRPr>
+            </a:pPr>
+            <a:r>
+              <a:t>Module script (from repo root)</a:t>
+            </a:r>
+          </a:p>
+        </p:txBody>
+      </p:sp>
+      <p:sp>
+        <p:nvSpPr>
+          <p:cNvPr id="3" name="TextBox 2"/>
+          <p:cNvSpPr txBox="1"/>
+          <p:nvPr/>
+        </p:nvSpPr>
+        <p:spPr>
+          <a:xfrm>
+            <a:off x="548640" y="1234440"/>
+            <a:ext cx="11064240" cy="4937760"/>
+          </a:xfrm>
+          <a:prstGeom prst="rect">
+            <a:avLst/>
+          </a:prstGeom>
+          <a:noFill/>
+        </p:spPr>
+        <p:txBody>
+          <a:bodyPr wrap="square">
+            <a:noAutofit/>
+          </a:bodyPr>
+          <a:lstStyle/>
+          <a:p>
+            <a:pPr>
+              <a:lnSpc>
+                <a:spcPts val="2200"/>
+              </a:lnSpc>
+              <a:spcAft>
+                <a:spcPts val="1000"/>
+              </a:spcAft>
+              <a:defRPr sz="2000" b="0">
+                <a:solidFill>
+                  <a:srgbClr val="333333"/>
+                </a:solidFill>
+                <a:latin typeface="Calibri"/>
+              </a:defRPr>
+            </a:pPr>
+            <a:r>
+              <a:t>• ./scripts/module2.sh --check # Environment + UVM +</a:t>
+            </a:r>
+          </a:p>
+          <a:p>
+            <a:pPr>
+              <a:lnSpc>
+                <a:spcPts val="2200"/>
+              </a:lnSpc>
+              <a:spcAft>
+                <a:spcPts val="1000"/>
+              </a:spcAft>
+              <a:defRPr sz="2000" b="0">
+                <a:solidFill>
+                  <a:srgbClr val="333333"/>
+                </a:solidFill>
+                <a:latin typeface="Calibri"/>
+              </a:defRPr>
+            </a:pPr>
+            <a:r>
+              <a:t>      example dirs</a:t>
+            </a:r>
+          </a:p>
+        </p:txBody>
+      </p:sp>
+      <p:sp>
+        <p:nvSpPr>
+          <p:cNvPr id="4" name="TextBox 3"/>
+          <p:cNvSpPr txBox="1"/>
+          <p:nvPr/>
+        </p:nvSpPr>
+        <p:spPr>
+          <a:xfrm>
+            <a:off x="548640" y="6355080"/>
+            <a:ext cx="11064240" cy="320040"/>
+          </a:xfrm>
+          <a:prstGeom prst="rect">
+            <a:avLst/>
+          </a:prstGeom>
+          <a:noFill/>
+        </p:spPr>
+        <p:txBody>
+          <a:bodyPr wrap="square">
+            <a:noAutofit/>
+          </a:bodyPr>
+          <a:lstStyle/>
+          <a:p>
+            <a:pPr algn="r">
+              <a:lnSpc>
+                <a:spcPts val="2200"/>
+              </a:lnSpc>
+              <a:defRPr sz="1000" b="0">
+                <a:solidFill>
+                  <a:srgbClr val="666666"/>
+                </a:solidFill>
+                <a:latin typeface="Calibri"/>
+              </a:defRPr>
+            </a:pPr>
+            <a:r>
+              <a:t>learn_uart_spi_i2c / Module 2</a:t>
+            </a:r>
+          </a:p>
+        </p:txBody>
+      </p:sp>
+    </p:spTree>
+  </p:cSld>
+  <p:clrMapOvr>
+    <a:masterClrMapping/>
+  </p:clrMapOvr>
+</p:sld>
+</file>
+
+<file path=ppt/slides/slide27.xml><?xml version="1.0" encoding="utf-8"?>
+<p:sld xmlns:a="http://schemas.openxmlformats.org/drawingml/2006/main" xmlns:p="http://schemas.openxmlformats.org/presentationml/2006/main" xmlns:r="http://schemas.openxmlformats.org/officeDocument/2006/relationships">
+  <p:cSld>
+    <p:spTree>
+      <p:nvGrpSpPr>
+        <p:cNvPr id="1" name=""/>
+        <p:cNvGrpSpPr/>
+        <p:nvPr/>
+      </p:nvGrpSpPr>
+      <p:grpSpPr/>
+      <p:sp>
+        <p:nvSpPr>
+          <p:cNvPr id="2" name="TextBox 1"/>
+          <p:cNvSpPr txBox="1"/>
+          <p:nvPr/>
+        </p:nvSpPr>
+        <p:spPr>
+          <a:xfrm>
+            <a:off x="548640" y="2743200"/>
+            <a:ext cx="11064240" cy="1371600"/>
+          </a:xfrm>
+          <a:prstGeom prst="rect">
+            <a:avLst/>
+          </a:prstGeom>
+          <a:noFill/>
+        </p:spPr>
+        <p:txBody>
+          <a:bodyPr wrap="square">
+            <a:noAutofit/>
+          </a:bodyPr>
+          <a:lstStyle/>
+          <a:p>
+            <a:pPr algn="ctr">
+              <a:lnSpc>
+                <a:spcPts val="2200"/>
+              </a:lnSpc>
+              <a:defRPr sz="3600" b="1">
+                <a:solidFill>
+                  <a:srgbClr val="1A1A2E"/>
+                </a:solidFill>
+                <a:latin typeface="Calibri"/>
+              </a:defRPr>
+            </a:pPr>
+            <a:r>
+              <a:t>Hands-on examples</a:t>
+            </a:r>
+          </a:p>
+        </p:txBody>
+      </p:sp>
+      <p:sp>
+        <p:nvSpPr>
+          <p:cNvPr id="3" name="TextBox 2"/>
+          <p:cNvSpPr txBox="1"/>
+          <p:nvPr/>
+        </p:nvSpPr>
+        <p:spPr>
+          <a:xfrm>
+            <a:off x="548640" y="6355080"/>
+            <a:ext cx="11064240" cy="320040"/>
+          </a:xfrm>
+          <a:prstGeom prst="rect">
+            <a:avLst/>
+          </a:prstGeom>
+          <a:noFill/>
+        </p:spPr>
+        <p:txBody>
+          <a:bodyPr wrap="square">
+            <a:noAutofit/>
+          </a:bodyPr>
+          <a:lstStyle/>
+          <a:p>
+            <a:pPr algn="r">
+              <a:lnSpc>
+                <a:spcPts val="2200"/>
+              </a:lnSpc>
+              <a:defRPr sz="1000" b="0">
+                <a:solidFill>
+                  <a:srgbClr val="666666"/>
+                </a:solidFill>
+                <a:latin typeface="Calibri"/>
+              </a:defRPr>
+            </a:pPr>
+            <a:r>
+              <a:t>learn_uart_spi_i2c / Module 2</a:t>
+            </a:r>
+          </a:p>
+        </p:txBody>
+      </p:sp>
+    </p:spTree>
+  </p:cSld>
+  <p:clrMapOvr>
+    <a:masterClrMapping/>
+  </p:clrMapOvr>
+</p:sld>
+</file>
+
+<file path=ppt/slides/slide28.xml><?xml version="1.0" encoding="utf-8"?>
+<p:sld xmlns:a="http://schemas.openxmlformats.org/drawingml/2006/main" xmlns:p="http://schemas.openxmlformats.org/presentationml/2006/main" xmlns:r="http://schemas.openxmlformats.org/officeDocument/2006/relationships">
+  <p:cSld>
+    <p:spTree>
+      <p:nvGrpSpPr>
+        <p:cNvPr id="1" name=""/>
+        <p:cNvGrpSpPr/>
+        <p:nvPr/>
+      </p:nvGrpSpPr>
+      <p:grpSpPr/>
+      <p:sp>
+        <p:nvSpPr>
+          <p:cNvPr id="2" name="TextBox 1"/>
+          <p:cNvSpPr txBox="1"/>
+          <p:nvPr/>
+        </p:nvSpPr>
+        <p:spPr>
+          <a:xfrm>
+            <a:off x="548640" y="411480"/>
+            <a:ext cx="11064240" cy="777240"/>
+          </a:xfrm>
+          <a:prstGeom prst="rect">
+            <a:avLst/>
+          </a:prstGeom>
+          <a:noFill/>
+        </p:spPr>
+        <p:txBody>
+          <a:bodyPr wrap="square">
+            <a:noAutofit/>
+          </a:bodyPr>
+          <a:lstStyle/>
+          <a:p>
+            <a:pPr>
+              <a:lnSpc>
+                <a:spcPts val="2200"/>
+              </a:lnSpc>
+              <a:defRPr sz="2800" b="1">
+                <a:solidFill>
+                  <a:srgbClr val="1A1A2E"/>
+                </a:solidFill>
+                <a:latin typeface="Calibri"/>
+              </a:defRPr>
+            </a:pPr>
+            <a:r>
+              <a:t>Module 2 self-check</a:t>
+            </a:r>
+          </a:p>
+        </p:txBody>
+      </p:sp>
+      <p:sp>
+        <p:nvSpPr>
+          <p:cNvPr id="3" name="TextBox 2"/>
+          <p:cNvSpPr txBox="1"/>
+          <p:nvPr/>
+        </p:nvSpPr>
+        <p:spPr>
+          <a:xfrm>
+            <a:off x="548640" y="1051560"/>
+            <a:ext cx="11064240" cy="914400"/>
+          </a:xfrm>
+          <a:prstGeom prst="rect">
+            <a:avLst/>
+          </a:prstGeom>
+          <a:solidFill>
+            <a:srgbClr val="F4F4F4"/>
+          </a:solidFill>
+        </p:spPr>
+        <p:txBody>
+          <a:bodyPr wrap="square">
+            <a:noAutofit/>
+          </a:bodyPr>
+          <a:lstStyle/>
+          <a:p>
+            <a:pPr>
+              <a:lnSpc>
+                <a:spcPts val="2200"/>
+              </a:lnSpc>
+              <a:spcAft>
+                <a:spcPts val="200"/>
+              </a:spcAft>
+              <a:defRPr sz="2000" b="0">
+                <a:solidFill>
+                  <a:srgbClr val="333333"/>
+                </a:solidFill>
+                <a:latin typeface="Consolas"/>
+              </a:defRPr>
+            </a:pPr>
+            <a:r>
+              <a:t>$ ./scripts/module2.sh --help</a:t>
+            </a:r>
+          </a:p>
+        </p:txBody>
+      </p:sp>
+      <p:pic>
+        <p:nvPicPr>
+          <p:cNvPr id="4" name="Picture 3" descr="module2_check.png"/>
+          <p:cNvPicPr>
+            <a:picLocks noChangeAspect="1"/>
+          </p:cNvPicPr>
+          <p:nvPr/>
+        </p:nvPicPr>
+        <p:blipFill>
+          <a:blip r:embed="rId2"/>
+          <a:stretch>
+            <a:fillRect/>
+          </a:stretch>
+        </p:blipFill>
+        <p:spPr>
+          <a:xfrm>
+            <a:off x="548640" y="1965960"/>
+            <a:ext cx="7071358" cy="3977639"/>
+          </a:xfrm>
+          <a:prstGeom prst="rect">
+            <a:avLst/>
+          </a:prstGeom>
+        </p:spPr>
+      </p:pic>
+      <p:sp>
+        <p:nvSpPr>
+          <p:cNvPr id="5" name="TextBox 4"/>
+          <p:cNvSpPr txBox="1"/>
+          <p:nvPr/>
+        </p:nvSpPr>
+        <p:spPr>
+          <a:xfrm>
+            <a:off x="548640" y="6355080"/>
+            <a:ext cx="11064240" cy="320040"/>
+          </a:xfrm>
+          <a:prstGeom prst="rect">
+            <a:avLst/>
+          </a:prstGeom>
+          <a:noFill/>
+        </p:spPr>
+        <p:txBody>
+          <a:bodyPr wrap="square">
+            <a:noAutofit/>
+          </a:bodyPr>
+          <a:lstStyle/>
+          <a:p>
+            <a:pPr algn="r">
+              <a:lnSpc>
+                <a:spcPts val="2200"/>
+              </a:lnSpc>
+              <a:defRPr sz="1000" b="0">
+                <a:solidFill>
+                  <a:srgbClr val="666666"/>
+                </a:solidFill>
+                <a:latin typeface="Calibri"/>
+              </a:defRPr>
+            </a:pPr>
+            <a:r>
+              <a:t>learn_uart_spi_i2c / Module 2</a:t>
+            </a:r>
+          </a:p>
+        </p:txBody>
+      </p:sp>
+    </p:spTree>
+  </p:cSld>
+  <p:clrMapOvr>
+    <a:masterClrMapping/>
+  </p:clrMapOvr>
+</p:sld>
+</file>
+
+<file path=ppt/slides/slide29.xml><?xml version="1.0" encoding="utf-8"?>
+<p:sld xmlns:a="http://schemas.openxmlformats.org/drawingml/2006/main" xmlns:p="http://schemas.openxmlformats.org/presentationml/2006/main" xmlns:r="http://schemas.openxmlformats.org/officeDocument/2006/relationships">
+  <p:cSld>
+    <p:spTree>
+      <p:nvGrpSpPr>
+        <p:cNvPr id="1" name=""/>
+        <p:cNvGrpSpPr/>
+        <p:nvPr/>
+      </p:nvGrpSpPr>
+      <p:grpSpPr/>
+      <p:sp>
+        <p:nvSpPr>
+          <p:cNvPr id="2" name="TextBox 1"/>
+          <p:cNvSpPr txBox="1"/>
+          <p:nvPr/>
+        </p:nvSpPr>
+        <p:spPr>
+          <a:xfrm>
+            <a:off x="548640" y="411480"/>
+            <a:ext cx="11064240" cy="777240"/>
+          </a:xfrm>
+          <a:prstGeom prst="rect">
+            <a:avLst/>
+          </a:prstGeom>
+          <a:noFill/>
+        </p:spPr>
+        <p:txBody>
+          <a:bodyPr wrap="square">
+            <a:noAutofit/>
+          </a:bodyPr>
+          <a:lstStyle/>
+          <a:p>
+            <a:pPr>
+              <a:lnSpc>
+                <a:spcPts val="2200"/>
+              </a:lnSpc>
+              <a:defRPr sz="2800" b="1">
+                <a:solidFill>
+                  <a:srgbClr val="1A1A2E"/>
+                </a:solidFill>
+                <a:latin typeface="Calibri"/>
+              </a:defRPr>
+            </a:pPr>
+            <a:r>
+              <a:t>Exercise scaffold</a:t>
+            </a:r>
+          </a:p>
+        </p:txBody>
+      </p:sp>
+      <p:sp>
+        <p:nvSpPr>
+          <p:cNvPr id="3" name="TextBox 2"/>
+          <p:cNvSpPr txBox="1"/>
+          <p:nvPr/>
+        </p:nvSpPr>
+        <p:spPr>
+          <a:xfrm>
+            <a:off x="548640" y="1143000"/>
+            <a:ext cx="11064240" cy="5029200"/>
+          </a:xfrm>
+          <a:prstGeom prst="rect">
+            <a:avLst/>
+          </a:prstGeom>
+          <a:solidFill>
+            <a:srgbClr val="F4F4F4"/>
+          </a:solidFill>
+        </p:spPr>
+        <p:txBody>
+          <a:bodyPr wrap="square">
+            <a:noAutofit/>
+          </a:bodyPr>
+          <a:lstStyle/>
+          <a:p>
+            <a:pPr>
+              <a:lnSpc>
+                <a:spcPts val="2200"/>
+              </a:lnSpc>
+              <a:spcAft>
+                <a:spcPts val="400"/>
+              </a:spcAft>
+              <a:defRPr sz="2000" b="0">
+                <a:solidFill>
+                  <a:srgbClr val="333333"/>
+                </a:solidFill>
+                <a:latin typeface="Consolas"/>
+              </a:defRPr>
+            </a:pPr>
+            <a:r>
+              <a:t>./scripts/module2.sh --scaffold</a:t>
             </a:r>
           </a:p>
         </p:txBody>
@@ -6586,6 +8659,1469 @@
 </p:sld>
 </file>
 
+<file path=ppt/slides/slide30.xml><?xml version="1.0" encoding="utf-8"?>
+<p:sld xmlns:a="http://schemas.openxmlformats.org/drawingml/2006/main" xmlns:p="http://schemas.openxmlformats.org/presentationml/2006/main" xmlns:r="http://schemas.openxmlformats.org/officeDocument/2006/relationships">
+  <p:cSld>
+    <p:spTree>
+      <p:nvGrpSpPr>
+        <p:cNvPr id="1" name=""/>
+        <p:cNvGrpSpPr/>
+        <p:nvPr/>
+      </p:nvGrpSpPr>
+      <p:grpSpPr/>
+      <p:sp>
+        <p:nvSpPr>
+          <p:cNvPr id="2" name="TextBox 1"/>
+          <p:cNvSpPr txBox="1"/>
+          <p:nvPr/>
+        </p:nvSpPr>
+        <p:spPr>
+          <a:xfrm>
+            <a:off x="548640" y="411480"/>
+            <a:ext cx="11064240" cy="777240"/>
+          </a:xfrm>
+          <a:prstGeom prst="rect">
+            <a:avLst/>
+          </a:prstGeom>
+          <a:noFill/>
+        </p:spPr>
+        <p:txBody>
+          <a:bodyPr wrap="square">
+            <a:noAutofit/>
+          </a:bodyPr>
+          <a:lstStyle/>
+          <a:p>
+            <a:pPr>
+              <a:lnSpc>
+                <a:spcPts val="2200"/>
+              </a:lnSpc>
+              <a:defRPr sz="2800" b="1">
+                <a:solidFill>
+                  <a:srgbClr val="1A1A2E"/>
+                </a:solidFill>
+                <a:latin typeface="Calibri"/>
+              </a:defRPr>
+            </a:pPr>
+            <a:r>
+              <a:t>Example 1: UVM smoke test</a:t>
+            </a:r>
+          </a:p>
+        </p:txBody>
+      </p:sp>
+      <p:sp>
+        <p:nvSpPr>
+          <p:cNvPr id="3" name="TextBox 2"/>
+          <p:cNvSpPr txBox="1"/>
+          <p:nvPr/>
+        </p:nvSpPr>
+        <p:spPr>
+          <a:xfrm>
+            <a:off x="548640" y="1234440"/>
+            <a:ext cx="11064240" cy="4937760"/>
+          </a:xfrm>
+          <a:prstGeom prst="rect">
+            <a:avLst/>
+          </a:prstGeom>
+          <a:noFill/>
+        </p:spPr>
+        <p:txBody>
+          <a:bodyPr wrap="square">
+            <a:noAutofit/>
+          </a:bodyPr>
+          <a:lstStyle/>
+          <a:p>
+            <a:pPr>
+              <a:lnSpc>
+                <a:spcPts val="2200"/>
+              </a:lnSpc>
+              <a:spcAft>
+                <a:spcPts val="1000"/>
+              </a:spcAft>
+              <a:defRPr sz="2000" b="0">
+                <a:solidFill>
+                  <a:srgbClr val="333333"/>
+                </a:solidFill>
+                <a:latin typeface="Calibri"/>
+              </a:defRPr>
+            </a:pPr>
+            <a:r>
+              <a:t>• UVM phases and reporting (DRIVER, MONITOR,</a:t>
+            </a:r>
+          </a:p>
+          <a:p>
+            <a:pPr>
+              <a:lnSpc>
+                <a:spcPts val="2200"/>
+              </a:lnSpc>
+              <a:spcAft>
+                <a:spcPts val="1000"/>
+              </a:spcAft>
+              <a:defRPr sz="2000" b="0">
+                <a:solidFill>
+                  <a:srgbClr val="333333"/>
+                </a:solidFill>
+                <a:latin typeface="Calibri"/>
+              </a:defRPr>
+            </a:pPr>
+            <a:r>
+              <a:t>      SCOREBOARD messages).</a:t>
+            </a:r>
+          </a:p>
+          <a:p>
+            <a:pPr>
+              <a:lnSpc>
+                <a:spcPts val="2200"/>
+              </a:lnSpc>
+              <a:spcAft>
+                <a:spcPts val="1000"/>
+              </a:spcAft>
+              <a:defRPr sz="2000" b="0">
+                <a:solidFill>
+                  <a:srgbClr val="333333"/>
+                </a:solidFill>
+                <a:latin typeface="Calibri"/>
+              </a:defRPr>
+            </a:pPr>
+            <a:r>
+              <a:t>• Directed sequence: a few data values (0x00, 0x01,</a:t>
+            </a:r>
+          </a:p>
+          <a:p>
+            <a:pPr>
+              <a:lnSpc>
+                <a:spcPts val="2200"/>
+              </a:lnSpc>
+              <a:spcAft>
+                <a:spcPts val="1000"/>
+              </a:spcAft>
+              <a:defRPr sz="2000" b="0">
+                <a:solidFill>
+                  <a:srgbClr val="333333"/>
+                </a:solidFill>
+                <a:latin typeface="Calibri"/>
+              </a:defRPr>
+            </a:pPr>
+            <a:r>
+              <a:t>      0x55, 0xAA, 0xFF) driven and checked.</a:t>
+            </a:r>
+          </a:p>
+          <a:p>
+            <a:pPr>
+              <a:lnSpc>
+                <a:spcPts val="2200"/>
+              </a:lnSpc>
+              <a:spcAft>
+                <a:spcPts val="1000"/>
+              </a:spcAft>
+              <a:defRPr sz="2000" b="0">
+                <a:solidFill>
+                  <a:srgbClr val="333333"/>
+                </a:solidFill>
+                <a:latin typeface="Calibri"/>
+              </a:defRPr>
+            </a:pPr>
+            <a:r>
+              <a:t>• Final scoreboard summary (matches/mismatches).</a:t>
+            </a:r>
+          </a:p>
+        </p:txBody>
+      </p:sp>
+      <p:sp>
+        <p:nvSpPr>
+          <p:cNvPr id="4" name="TextBox 3"/>
+          <p:cNvSpPr txBox="1"/>
+          <p:nvPr/>
+        </p:nvSpPr>
+        <p:spPr>
+          <a:xfrm>
+            <a:off x="548640" y="6355080"/>
+            <a:ext cx="11064240" cy="320040"/>
+          </a:xfrm>
+          <a:prstGeom prst="rect">
+            <a:avLst/>
+          </a:prstGeom>
+          <a:noFill/>
+        </p:spPr>
+        <p:txBody>
+          <a:bodyPr wrap="square">
+            <a:noAutofit/>
+          </a:bodyPr>
+          <a:lstStyle/>
+          <a:p>
+            <a:pPr algn="r">
+              <a:lnSpc>
+                <a:spcPts val="2200"/>
+              </a:lnSpc>
+              <a:defRPr sz="1000" b="0">
+                <a:solidFill>
+                  <a:srgbClr val="666666"/>
+                </a:solidFill>
+                <a:latin typeface="Calibri"/>
+              </a:defRPr>
+            </a:pPr>
+            <a:r>
+              <a:t>learn_uart_spi_i2c / Module 2</a:t>
+            </a:r>
+          </a:p>
+        </p:txBody>
+      </p:sp>
+    </p:spTree>
+  </p:cSld>
+  <p:clrMapOvr>
+    <a:masterClrMapping/>
+  </p:clrMapOvr>
+</p:sld>
+</file>
+
+<file path=ppt/slides/slide31.xml><?xml version="1.0" encoding="utf-8"?>
+<p:sld xmlns:a="http://schemas.openxmlformats.org/drawingml/2006/main" xmlns:p="http://schemas.openxmlformats.org/presentationml/2006/main" xmlns:r="http://schemas.openxmlformats.org/officeDocument/2006/relationships">
+  <p:cSld>
+    <p:spTree>
+      <p:nvGrpSpPr>
+        <p:cNvPr id="1" name=""/>
+        <p:cNvGrpSpPr/>
+        <p:nvPr/>
+      </p:nvGrpSpPr>
+      <p:grpSpPr/>
+      <p:sp>
+        <p:nvSpPr>
+          <p:cNvPr id="2" name="TextBox 1"/>
+          <p:cNvSpPr txBox="1"/>
+          <p:nvPr/>
+        </p:nvSpPr>
+        <p:spPr>
+          <a:xfrm>
+            <a:off x="548640" y="411480"/>
+            <a:ext cx="11064240" cy="777240"/>
+          </a:xfrm>
+          <a:prstGeom prst="rect">
+            <a:avLst/>
+          </a:prstGeom>
+          <a:noFill/>
+        </p:spPr>
+        <p:txBody>
+          <a:bodyPr wrap="square">
+            <a:noAutofit/>
+          </a:bodyPr>
+          <a:lstStyle/>
+          <a:p>
+            <a:pPr>
+              <a:lnSpc>
+                <a:spcPts val="2200"/>
+              </a:lnSpc>
+              <a:defRPr sz="2800" b="1">
+                <a:solidFill>
+                  <a:srgbClr val="1A1A2E"/>
+                </a:solidFill>
+                <a:latin typeface="Calibri"/>
+              </a:defRPr>
+            </a:pPr>
+            <a:r>
+              <a:t>Demo: UVM smoke test</a:t>
+            </a:r>
+          </a:p>
+        </p:txBody>
+      </p:sp>
+      <p:sp>
+        <p:nvSpPr>
+          <p:cNvPr id="3" name="TextBox 2"/>
+          <p:cNvSpPr txBox="1"/>
+          <p:nvPr/>
+        </p:nvSpPr>
+        <p:spPr>
+          <a:xfrm>
+            <a:off x="548640" y="1051560"/>
+            <a:ext cx="11064240" cy="914400"/>
+          </a:xfrm>
+          <a:prstGeom prst="rect">
+            <a:avLst/>
+          </a:prstGeom>
+          <a:solidFill>
+            <a:srgbClr val="F4F4F4"/>
+          </a:solidFill>
+        </p:spPr>
+        <p:txBody>
+          <a:bodyPr wrap="square">
+            <a:noAutofit/>
+          </a:bodyPr>
+          <a:lstStyle/>
+          <a:p>
+            <a:pPr>
+              <a:lnSpc>
+                <a:spcPts val="2200"/>
+              </a:lnSpc>
+              <a:spcAft>
+                <a:spcPts val="200"/>
+              </a:spcAft>
+              <a:defRPr sz="2000" b="0">
+                <a:solidFill>
+                  <a:srgbClr val="333333"/>
+                </a:solidFill>
+                <a:latin typeface="Consolas"/>
+              </a:defRPr>
+            </a:pPr>
+            <a:r>
+              <a:t>$ ./scripts/module2.sh --run</a:t>
+            </a:r>
+          </a:p>
+        </p:txBody>
+      </p:sp>
+      <p:pic>
+        <p:nvPicPr>
+          <p:cNvPr id="4" name="Picture 3" descr="uvm_smoke.png"/>
+          <p:cNvPicPr>
+            <a:picLocks noChangeAspect="1"/>
+          </p:cNvPicPr>
+          <p:nvPr/>
+        </p:nvPicPr>
+        <p:blipFill>
+          <a:blip r:embed="rId2"/>
+          <a:stretch>
+            <a:fillRect/>
+          </a:stretch>
+        </p:blipFill>
+        <p:spPr>
+          <a:xfrm>
+            <a:off x="548640" y="1965960"/>
+            <a:ext cx="7071358" cy="3977639"/>
+          </a:xfrm>
+          <a:prstGeom prst="rect">
+            <a:avLst/>
+          </a:prstGeom>
+        </p:spPr>
+      </p:pic>
+      <p:sp>
+        <p:nvSpPr>
+          <p:cNvPr id="5" name="TextBox 4"/>
+          <p:cNvSpPr txBox="1"/>
+          <p:nvPr/>
+        </p:nvSpPr>
+        <p:spPr>
+          <a:xfrm>
+            <a:off x="548640" y="6355080"/>
+            <a:ext cx="11064240" cy="320040"/>
+          </a:xfrm>
+          <a:prstGeom prst="rect">
+            <a:avLst/>
+          </a:prstGeom>
+          <a:noFill/>
+        </p:spPr>
+        <p:txBody>
+          <a:bodyPr wrap="square">
+            <a:noAutofit/>
+          </a:bodyPr>
+          <a:lstStyle/>
+          <a:p>
+            <a:pPr algn="r">
+              <a:lnSpc>
+                <a:spcPts val="2200"/>
+              </a:lnSpc>
+              <a:defRPr sz="1000" b="0">
+                <a:solidFill>
+                  <a:srgbClr val="666666"/>
+                </a:solidFill>
+                <a:latin typeface="Calibri"/>
+              </a:defRPr>
+            </a:pPr>
+            <a:r>
+              <a:t>learn_uart_spi_i2c / Module 2</a:t>
+            </a:r>
+          </a:p>
+        </p:txBody>
+      </p:sp>
+    </p:spTree>
+  </p:cSld>
+  <p:clrMapOvr>
+    <a:masterClrMapping/>
+  </p:clrMapOvr>
+</p:sld>
+</file>
+
+<file path=ppt/slides/slide32.xml><?xml version="1.0" encoding="utf-8"?>
+<p:sld xmlns:a="http://schemas.openxmlformats.org/drawingml/2006/main" xmlns:p="http://schemas.openxmlformats.org/presentationml/2006/main" xmlns:r="http://schemas.openxmlformats.org/officeDocument/2006/relationships">
+  <p:cSld>
+    <p:spTree>
+      <p:nvGrpSpPr>
+        <p:cNvPr id="1" name=""/>
+        <p:cNvGrpSpPr/>
+        <p:nvPr/>
+      </p:nvGrpSpPr>
+      <p:grpSpPr/>
+      <p:sp>
+        <p:nvSpPr>
+          <p:cNvPr id="2" name="TextBox 1"/>
+          <p:cNvSpPr txBox="1"/>
+          <p:nvPr/>
+        </p:nvSpPr>
+        <p:spPr>
+          <a:xfrm>
+            <a:off x="548640" y="2743200"/>
+            <a:ext cx="11064240" cy="1371600"/>
+          </a:xfrm>
+          <a:prstGeom prst="rect">
+            <a:avLst/>
+          </a:prstGeom>
+          <a:noFill/>
+        </p:spPr>
+        <p:txBody>
+          <a:bodyPr wrap="square">
+            <a:noAutofit/>
+          </a:bodyPr>
+          <a:lstStyle/>
+          <a:p>
+            <a:pPr algn="ctr">
+              <a:lnSpc>
+                <a:spcPts val="2200"/>
+              </a:lnSpc>
+              <a:defRPr sz="3600" b="1">
+                <a:solidFill>
+                  <a:srgbClr val="1A1A2E"/>
+                </a:solidFill>
+                <a:latin typeface="Calibri"/>
+              </a:defRPr>
+            </a:pPr>
+            <a:r>
+              <a:t>Practice &amp; assessment</a:t>
+            </a:r>
+          </a:p>
+        </p:txBody>
+      </p:sp>
+      <p:sp>
+        <p:nvSpPr>
+          <p:cNvPr id="3" name="TextBox 2"/>
+          <p:cNvSpPr txBox="1"/>
+          <p:nvPr/>
+        </p:nvSpPr>
+        <p:spPr>
+          <a:xfrm>
+            <a:off x="548640" y="6355080"/>
+            <a:ext cx="11064240" cy="320040"/>
+          </a:xfrm>
+          <a:prstGeom prst="rect">
+            <a:avLst/>
+          </a:prstGeom>
+          <a:noFill/>
+        </p:spPr>
+        <p:txBody>
+          <a:bodyPr wrap="square">
+            <a:noAutofit/>
+          </a:bodyPr>
+          <a:lstStyle/>
+          <a:p>
+            <a:pPr algn="r">
+              <a:lnSpc>
+                <a:spcPts val="2200"/>
+              </a:lnSpc>
+              <a:defRPr sz="1000" b="0">
+                <a:solidFill>
+                  <a:srgbClr val="666666"/>
+                </a:solidFill>
+                <a:latin typeface="Calibri"/>
+              </a:defRPr>
+            </a:pPr>
+            <a:r>
+              <a:t>learn_uart_spi_i2c / Module 2</a:t>
+            </a:r>
+          </a:p>
+        </p:txBody>
+      </p:sp>
+    </p:spTree>
+  </p:cSld>
+  <p:clrMapOvr>
+    <a:masterClrMapping/>
+  </p:clrMapOvr>
+</p:sld>
+</file>
+
+<file path=ppt/slides/slide33.xml><?xml version="1.0" encoding="utf-8"?>
+<p:sld xmlns:a="http://schemas.openxmlformats.org/drawingml/2006/main" xmlns:p="http://schemas.openxmlformats.org/presentationml/2006/main" xmlns:r="http://schemas.openxmlformats.org/officeDocument/2006/relationships">
+  <p:cSld>
+    <p:spTree>
+      <p:nvGrpSpPr>
+        <p:cNvPr id="1" name=""/>
+        <p:cNvGrpSpPr/>
+        <p:nvPr/>
+      </p:nvGrpSpPr>
+      <p:grpSpPr/>
+      <p:sp>
+        <p:nvSpPr>
+          <p:cNvPr id="2" name="TextBox 1"/>
+          <p:cNvSpPr txBox="1"/>
+          <p:nvPr/>
+        </p:nvSpPr>
+        <p:spPr>
+          <a:xfrm>
+            <a:off x="548640" y="411480"/>
+            <a:ext cx="11064240" cy="777240"/>
+          </a:xfrm>
+          <a:prstGeom prst="rect">
+            <a:avLst/>
+          </a:prstGeom>
+          <a:noFill/>
+        </p:spPr>
+        <p:txBody>
+          <a:bodyPr wrap="square">
+            <a:noAutofit/>
+          </a:bodyPr>
+          <a:lstStyle/>
+          <a:p>
+            <a:pPr>
+              <a:lnSpc>
+                <a:spcPts val="2200"/>
+              </a:lnSpc>
+              <a:defRPr sz="2800" b="1">
+                <a:solidFill>
+                  <a:srgbClr val="1A1A2E"/>
+                </a:solidFill>
+                <a:latin typeface="Calibri"/>
+              </a:defRPr>
+            </a:pPr>
+            <a:r>
+              <a:t>What you should know</a:t>
+            </a:r>
+          </a:p>
+        </p:txBody>
+      </p:sp>
+      <p:sp>
+        <p:nvSpPr>
+          <p:cNvPr id="3" name="TextBox 2"/>
+          <p:cNvSpPr txBox="1"/>
+          <p:nvPr/>
+        </p:nvSpPr>
+        <p:spPr>
+          <a:xfrm>
+            <a:off x="548640" y="1234440"/>
+            <a:ext cx="11064240" cy="4937760"/>
+          </a:xfrm>
+          <a:prstGeom prst="rect">
+            <a:avLst/>
+          </a:prstGeom>
+          <a:noFill/>
+        </p:spPr>
+        <p:txBody>
+          <a:bodyPr wrap="square">
+            <a:noAutofit/>
+          </a:bodyPr>
+          <a:lstStyle/>
+          <a:p>
+            <a:pPr>
+              <a:lnSpc>
+                <a:spcPts val="2200"/>
+              </a:lnSpc>
+              <a:spcAft>
+                <a:spcPts val="1000"/>
+              </a:spcAft>
+              <a:defRPr sz="2000" b="0">
+                <a:solidFill>
+                  <a:srgbClr val="333333"/>
+                </a:solidFill>
+                <a:latin typeface="Calibri"/>
+              </a:defRPr>
+            </a:pPr>
+            <a:r>
+              <a:t>• Explain basic testbench (directed tests, pin</a:t>
+            </a:r>
+          </a:p>
+          <a:p>
+            <a:pPr>
+              <a:lnSpc>
+                <a:spcPts val="2200"/>
+              </a:lnSpc>
+              <a:spcAft>
+                <a:spcPts val="1000"/>
+              </a:spcAft>
+              <a:defRPr sz="2000" b="0">
+                <a:solidFill>
+                  <a:srgbClr val="333333"/>
+                </a:solidFill>
+                <a:latin typeface="Calibri"/>
+              </a:defRPr>
+            </a:pPr>
+            <a:r>
+              <a:t>      wiggling) and how it evolves into UVM (transaction,</a:t>
+            </a:r>
+          </a:p>
+          <a:p>
+            <a:pPr>
+              <a:lnSpc>
+                <a:spcPts val="2200"/>
+              </a:lnSpc>
+              <a:spcAft>
+                <a:spcPts val="1000"/>
+              </a:spcAft>
+              <a:defRPr sz="2000" b="0">
+                <a:solidFill>
+                  <a:srgbClr val="333333"/>
+                </a:solidFill>
+                <a:latin typeface="Calibri"/>
+              </a:defRPr>
+            </a:pPr>
+            <a:r>
+              <a:t>      se…</a:t>
+            </a:r>
+          </a:p>
+          <a:p>
+            <a:pPr>
+              <a:lnSpc>
+                <a:spcPts val="2200"/>
+              </a:lnSpc>
+              <a:spcAft>
+                <a:spcPts val="1000"/>
+              </a:spcAft>
+              <a:defRPr sz="2000" b="0">
+                <a:solidFill>
+                  <a:srgbClr val="333333"/>
+                </a:solidFill>
+                <a:latin typeface="Calibri"/>
+              </a:defRPr>
+            </a:pPr>
+            <a:r>
+              <a:t>• Describe the role of transaction, sequence, driver,</a:t>
+            </a:r>
+          </a:p>
+          <a:p>
+            <a:pPr>
+              <a:lnSpc>
+                <a:spcPts val="2200"/>
+              </a:lnSpc>
+              <a:spcAft>
+                <a:spcPts val="1000"/>
+              </a:spcAft>
+              <a:defRPr sz="2000" b="0">
+                <a:solidFill>
+                  <a:srgbClr val="333333"/>
+                </a:solidFill>
+                <a:latin typeface="Calibri"/>
+              </a:defRPr>
+            </a:pPr>
+            <a:r>
+              <a:t>      monitor, scoreboard, agent, env, and test in a…</a:t>
+            </a:r>
+          </a:p>
+          <a:p>
+            <a:pPr>
+              <a:lnSpc>
+                <a:spcPts val="2200"/>
+              </a:lnSpc>
+              <a:spcAft>
+                <a:spcPts val="1000"/>
+              </a:spcAft>
+              <a:defRPr sz="2000" b="0">
+                <a:solidFill>
+                  <a:srgbClr val="333333"/>
+                </a:solidFill>
+                <a:latin typeface="Calibri"/>
+              </a:defRPr>
+            </a:pPr>
+            <a:r>
+              <a:t>• Run the uvm_smoke example (make SIM=verilator</a:t>
+            </a:r>
+          </a:p>
+          <a:p>
+            <a:pPr>
+              <a:lnSpc>
+                <a:spcPts val="2200"/>
+              </a:lnSpc>
+              <a:spcAft>
+                <a:spcPts val="1000"/>
+              </a:spcAft>
+              <a:defRPr sz="2000" b="0">
+                <a:solidFill>
+                  <a:srgbClr val="333333"/>
+                </a:solidFill>
+                <a:latin typeface="Calibri"/>
+              </a:defRPr>
+            </a:pPr>
+            <a:r>
+              <a:t>      TEST=test_uvm_smoke) and interpret UVM output.</a:t>
+            </a:r>
+          </a:p>
+          <a:p>
+            <a:pPr>
+              <a:lnSpc>
+                <a:spcPts val="2200"/>
+              </a:lnSpc>
+              <a:spcAft>
+                <a:spcPts val="1000"/>
+              </a:spcAft>
+              <a:defRPr sz="2000" b="0">
+                <a:solidFill>
+                  <a:srgbClr val="333333"/>
+                </a:solidFill>
+                <a:latin typeface="Calibri"/>
+              </a:defRPr>
+            </a:pPr>
+            <a:r>
+              <a:t>• Use the toolchain: Verilator, UVM_HOME, Make; know</a:t>
+            </a:r>
+          </a:p>
+          <a:p>
+            <a:pPr>
+              <a:lnSpc>
+                <a:spcPts val="2200"/>
+              </a:lnSpc>
+              <a:spcAft>
+                <a:spcPts val="1000"/>
+              </a:spcAft>
+              <a:defRPr sz="2000" b="0">
+                <a:solidFill>
+                  <a:srgbClr val="333333"/>
+                </a:solidFill>
+                <a:latin typeface="Calibri"/>
+              </a:defRPr>
+            </a:pPr>
+            <a:r>
+              <a:t>      why `-sv`, `--timing`, and include paths are nee…</a:t>
+            </a:r>
+          </a:p>
+          <a:p>
+            <a:pPr>
+              <a:lnSpc>
+                <a:spcPts val="2200"/>
+              </a:lnSpc>
+              <a:spcAft>
+                <a:spcPts val="1000"/>
+              </a:spcAft>
+              <a:defRPr sz="2000" b="0">
+                <a:solidFill>
+                  <a:srgbClr val="333333"/>
+                </a:solidFill>
+                <a:latin typeface="Calibri"/>
+              </a:defRPr>
+            </a:pPr>
+            <a:r>
+              <a:t>• Be ready for Module 3: UART protocol + RTL + basic</a:t>
+            </a:r>
+          </a:p>
+          <a:p>
+            <a:pPr>
+              <a:lnSpc>
+                <a:spcPts val="2200"/>
+              </a:lnSpc>
+              <a:spcAft>
+                <a:spcPts val="1000"/>
+              </a:spcAft>
+              <a:defRPr sz="2000" b="0">
+                <a:solidFill>
+                  <a:srgbClr val="333333"/>
+                </a:solidFill>
+                <a:latin typeface="Calibri"/>
+              </a:defRPr>
+            </a:pPr>
+            <a:r>
+              <a:t>      (non-UVM) testbench.</a:t>
+            </a:r>
+          </a:p>
+        </p:txBody>
+      </p:sp>
+      <p:sp>
+        <p:nvSpPr>
+          <p:cNvPr id="4" name="TextBox 3"/>
+          <p:cNvSpPr txBox="1"/>
+          <p:nvPr/>
+        </p:nvSpPr>
+        <p:spPr>
+          <a:xfrm>
+            <a:off x="548640" y="6355080"/>
+            <a:ext cx="11064240" cy="320040"/>
+          </a:xfrm>
+          <a:prstGeom prst="rect">
+            <a:avLst/>
+          </a:prstGeom>
+          <a:noFill/>
+        </p:spPr>
+        <p:txBody>
+          <a:bodyPr wrap="square">
+            <a:noAutofit/>
+          </a:bodyPr>
+          <a:lstStyle/>
+          <a:p>
+            <a:pPr algn="r">
+              <a:lnSpc>
+                <a:spcPts val="2200"/>
+              </a:lnSpc>
+              <a:defRPr sz="1000" b="0">
+                <a:solidFill>
+                  <a:srgbClr val="666666"/>
+                </a:solidFill>
+                <a:latin typeface="Calibri"/>
+              </a:defRPr>
+            </a:pPr>
+            <a:r>
+              <a:t>learn_uart_spi_i2c / Module 2</a:t>
+            </a:r>
+          </a:p>
+        </p:txBody>
+      </p:sp>
+    </p:spTree>
+  </p:cSld>
+  <p:clrMapOvr>
+    <a:masterClrMapping/>
+  </p:clrMapOvr>
+</p:sld>
+</file>
+
+<file path=ppt/slides/slide34.xml><?xml version="1.0" encoding="utf-8"?>
+<p:sld xmlns:a="http://schemas.openxmlformats.org/drawingml/2006/main" xmlns:p="http://schemas.openxmlformats.org/presentationml/2006/main" xmlns:r="http://schemas.openxmlformats.org/officeDocument/2006/relationships">
+  <p:cSld>
+    <p:spTree>
+      <p:nvGrpSpPr>
+        <p:cNvPr id="1" name=""/>
+        <p:cNvGrpSpPr/>
+        <p:nvPr/>
+      </p:nvGrpSpPr>
+      <p:grpSpPr/>
+      <p:sp>
+        <p:nvSpPr>
+          <p:cNvPr id="2" name="TextBox 1"/>
+          <p:cNvSpPr txBox="1"/>
+          <p:nvPr/>
+        </p:nvSpPr>
+        <p:spPr>
+          <a:xfrm>
+            <a:off x="548640" y="411480"/>
+            <a:ext cx="11064240" cy="777240"/>
+          </a:xfrm>
+          <a:prstGeom prst="rect">
+            <a:avLst/>
+          </a:prstGeom>
+          <a:noFill/>
+        </p:spPr>
+        <p:txBody>
+          <a:bodyPr wrap="square">
+            <a:noAutofit/>
+          </a:bodyPr>
+          <a:lstStyle/>
+          <a:p>
+            <a:pPr>
+              <a:lnSpc>
+                <a:spcPts val="2200"/>
+              </a:lnSpc>
+              <a:defRPr sz="2800" b="1">
+                <a:solidFill>
+                  <a:srgbClr val="1A1A2E"/>
+                </a:solidFill>
+                <a:latin typeface="Calibri"/>
+              </a:defRPr>
+            </a:pPr>
+            <a:r>
+              <a:t>Exercises</a:t>
+            </a:r>
+          </a:p>
+        </p:txBody>
+      </p:sp>
+      <p:sp>
+        <p:nvSpPr>
+          <p:cNvPr id="3" name="TextBox 2"/>
+          <p:cNvSpPr txBox="1"/>
+          <p:nvPr/>
+        </p:nvSpPr>
+        <p:spPr>
+          <a:xfrm>
+            <a:off x="548640" y="1234440"/>
+            <a:ext cx="11064240" cy="4937760"/>
+          </a:xfrm>
+          <a:prstGeom prst="rect">
+            <a:avLst/>
+          </a:prstGeom>
+          <a:noFill/>
+        </p:spPr>
+        <p:txBody>
+          <a:bodyPr wrap="square">
+            <a:noAutofit/>
+          </a:bodyPr>
+          <a:lstStyle/>
+          <a:p>
+            <a:pPr>
+              <a:lnSpc>
+                <a:spcPts val="2200"/>
+              </a:lnSpc>
+              <a:spcAft>
+                <a:spcPts val="1000"/>
+              </a:spcAft>
+              <a:defRPr sz="2000" b="0">
+                <a:solidFill>
+                  <a:srgbClr val="333333"/>
+                </a:solidFill>
+                <a:latin typeface="Calibri"/>
+              </a:defRPr>
+            </a:pPr>
+            <a:r>
+              <a:t>• Run uvm_smoke</a:t>
+            </a:r>
+          </a:p>
+          <a:p>
+            <a:pPr>
+              <a:lnSpc>
+                <a:spcPts val="2200"/>
+              </a:lnSpc>
+              <a:spcAft>
+                <a:spcPts val="1000"/>
+              </a:spcAft>
+              <a:defRPr sz="2000" b="0">
+                <a:solidFill>
+                  <a:srgbClr val="333333"/>
+                </a:solidFill>
+                <a:latin typeface="Calibri"/>
+              </a:defRPr>
+            </a:pPr>
+            <a:r>
+              <a:t>• Traceability</a:t>
+            </a:r>
+          </a:p>
+          <a:p>
+            <a:pPr>
+              <a:lnSpc>
+                <a:spcPts val="2200"/>
+              </a:lnSpc>
+              <a:spcAft>
+                <a:spcPts val="1000"/>
+              </a:spcAft>
+              <a:defRPr sz="2000" b="0">
+                <a:solidFill>
+                  <a:srgbClr val="333333"/>
+                </a:solidFill>
+                <a:latin typeface="Calibri"/>
+              </a:defRPr>
+            </a:pPr>
+            <a:r>
+              <a:t>• Change the sequence</a:t>
+            </a:r>
+          </a:p>
+          <a:p>
+            <a:pPr>
+              <a:lnSpc>
+                <a:spcPts val="2200"/>
+              </a:lnSpc>
+              <a:spcAft>
+                <a:spcPts val="1000"/>
+              </a:spcAft>
+              <a:defRPr sz="2000" b="0">
+                <a:solidFill>
+                  <a:srgbClr val="333333"/>
+                </a:solidFill>
+                <a:latin typeface="Calibri"/>
+              </a:defRPr>
+            </a:pPr>
+            <a:r>
+              <a:t>• Optional: Waveforms</a:t>
+            </a:r>
+          </a:p>
+        </p:txBody>
+      </p:sp>
+      <p:sp>
+        <p:nvSpPr>
+          <p:cNvPr id="4" name="TextBox 3"/>
+          <p:cNvSpPr txBox="1"/>
+          <p:nvPr/>
+        </p:nvSpPr>
+        <p:spPr>
+          <a:xfrm>
+            <a:off x="548640" y="6355080"/>
+            <a:ext cx="11064240" cy="320040"/>
+          </a:xfrm>
+          <a:prstGeom prst="rect">
+            <a:avLst/>
+          </a:prstGeom>
+          <a:noFill/>
+        </p:spPr>
+        <p:txBody>
+          <a:bodyPr wrap="square">
+            <a:noAutofit/>
+          </a:bodyPr>
+          <a:lstStyle/>
+          <a:p>
+            <a:pPr algn="r">
+              <a:lnSpc>
+                <a:spcPts val="2200"/>
+              </a:lnSpc>
+              <a:defRPr sz="1000" b="0">
+                <a:solidFill>
+                  <a:srgbClr val="666666"/>
+                </a:solidFill>
+                <a:latin typeface="Calibri"/>
+              </a:defRPr>
+            </a:pPr>
+            <a:r>
+              <a:t>learn_uart_spi_i2c / Module 2</a:t>
+            </a:r>
+          </a:p>
+        </p:txBody>
+      </p:sp>
+    </p:spTree>
+  </p:cSld>
+  <p:clrMapOvr>
+    <a:masterClrMapping/>
+  </p:clrMapOvr>
+</p:sld>
+</file>
+
+<file path=ppt/slides/slide35.xml><?xml version="1.0" encoding="utf-8"?>
+<p:sld xmlns:a="http://schemas.openxmlformats.org/drawingml/2006/main" xmlns:p="http://schemas.openxmlformats.org/presentationml/2006/main" xmlns:r="http://schemas.openxmlformats.org/officeDocument/2006/relationships">
+  <p:cSld>
+    <p:spTree>
+      <p:nvGrpSpPr>
+        <p:cNvPr id="1" name=""/>
+        <p:cNvGrpSpPr/>
+        <p:nvPr/>
+      </p:nvGrpSpPr>
+      <p:grpSpPr/>
+      <p:sp>
+        <p:nvSpPr>
+          <p:cNvPr id="2" name="TextBox 1"/>
+          <p:cNvSpPr txBox="1"/>
+          <p:nvPr/>
+        </p:nvSpPr>
+        <p:spPr>
+          <a:xfrm>
+            <a:off x="548640" y="411480"/>
+            <a:ext cx="11064240" cy="777240"/>
+          </a:xfrm>
+          <a:prstGeom prst="rect">
+            <a:avLst/>
+          </a:prstGeom>
+          <a:noFill/>
+        </p:spPr>
+        <p:txBody>
+          <a:bodyPr wrap="square">
+            <a:noAutofit/>
+          </a:bodyPr>
+          <a:lstStyle/>
+          <a:p>
+            <a:pPr>
+              <a:lnSpc>
+                <a:spcPts val="2200"/>
+              </a:lnSpc>
+              <a:defRPr sz="2800" b="1">
+                <a:solidFill>
+                  <a:srgbClr val="1A1A2E"/>
+                </a:solidFill>
+                <a:latin typeface="Calibri"/>
+              </a:defRPr>
+            </a:pPr>
+            <a:r>
+              <a:t>Assessment checklist</a:t>
+            </a:r>
+          </a:p>
+        </p:txBody>
+      </p:sp>
+      <p:sp>
+        <p:nvSpPr>
+          <p:cNvPr id="3" name="TextBox 2"/>
+          <p:cNvSpPr txBox="1"/>
+          <p:nvPr/>
+        </p:nvSpPr>
+        <p:spPr>
+          <a:xfrm>
+            <a:off x="548640" y="1234440"/>
+            <a:ext cx="11064240" cy="4937760"/>
+          </a:xfrm>
+          <a:prstGeom prst="rect">
+            <a:avLst/>
+          </a:prstGeom>
+          <a:noFill/>
+        </p:spPr>
+        <p:txBody>
+          <a:bodyPr wrap="square">
+            <a:noAutofit/>
+          </a:bodyPr>
+          <a:lstStyle/>
+          <a:p>
+            <a:pPr>
+              <a:lnSpc>
+                <a:spcPts val="2200"/>
+              </a:lnSpc>
+              <a:spcAft>
+                <a:spcPts val="1000"/>
+              </a:spcAft>
+              <a:defRPr sz="2000" b="0">
+                <a:solidFill>
+                  <a:srgbClr val="333333"/>
+                </a:solidFill>
+                <a:latin typeface="Calibri"/>
+              </a:defRPr>
+            </a:pPr>
+            <a:r>
+              <a:t>• Can explain basic TB vs UVM (transaction, sequence,</a:t>
+            </a:r>
+          </a:p>
+          <a:p>
+            <a:pPr>
+              <a:lnSpc>
+                <a:spcPts val="2200"/>
+              </a:lnSpc>
+              <a:spcAft>
+                <a:spcPts val="1000"/>
+              </a:spcAft>
+              <a:defRPr sz="2000" b="0">
+                <a:solidFill>
+                  <a:srgbClr val="333333"/>
+                </a:solidFill>
+                <a:latin typeface="Calibri"/>
+              </a:defRPr>
+            </a:pPr>
+            <a:r>
+              <a:t>      driver, monitor, scoreboard).</a:t>
+            </a:r>
+          </a:p>
+          <a:p>
+            <a:pPr>
+              <a:lnSpc>
+                <a:spcPts val="2200"/>
+              </a:lnSpc>
+              <a:spcAft>
+                <a:spcPts val="1000"/>
+              </a:spcAft>
+              <a:defRPr sz="2000" b="0">
+                <a:solidFill>
+                  <a:srgbClr val="333333"/>
+                </a:solidFill>
+                <a:latin typeface="Calibri"/>
+              </a:defRPr>
+            </a:pPr>
+            <a:r>
+              <a:t>• Can describe the role of UVM_HOME, Verilator flags,</a:t>
+            </a:r>
+          </a:p>
+          <a:p>
+            <a:pPr>
+              <a:lnSpc>
+                <a:spcPts val="2200"/>
+              </a:lnSpc>
+              <a:spcAft>
+                <a:spcPts val="1000"/>
+              </a:spcAft>
+              <a:defRPr sz="2000" b="0">
+                <a:solidFill>
+                  <a:srgbClr val="333333"/>
+                </a:solidFill>
+                <a:latin typeface="Calibri"/>
+              </a:defRPr>
+            </a:pPr>
+            <a:r>
+              <a:t>      and Make in building/running a UVM test.</a:t>
+            </a:r>
+          </a:p>
+          <a:p>
+            <a:pPr>
+              <a:lnSpc>
+                <a:spcPts val="2200"/>
+              </a:lnSpc>
+              <a:spcAft>
+                <a:spcPts val="1000"/>
+              </a:spcAft>
+              <a:defRPr sz="2000" b="0">
+                <a:solidFill>
+                  <a:srgbClr val="333333"/>
+                </a:solidFill>
+                <a:latin typeface="Calibri"/>
+              </a:defRPr>
+            </a:pPr>
+            <a:r>
+              <a:t>• Can run uvm_smoke and interpret the output.</a:t>
+            </a:r>
+          </a:p>
+          <a:p>
+            <a:pPr>
+              <a:lnSpc>
+                <a:spcPts val="2200"/>
+              </a:lnSpc>
+              <a:spcAft>
+                <a:spcPts val="1000"/>
+              </a:spcAft>
+              <a:defRPr sz="2000" b="0">
+                <a:solidFill>
+                  <a:srgbClr val="333333"/>
+                </a:solidFill>
+                <a:latin typeface="Calibri"/>
+              </a:defRPr>
+            </a:pPr>
+            <a:r>
+              <a:t>• Ready to move to Module 3 (UART protocol + RTL +</a:t>
+            </a:r>
+          </a:p>
+          <a:p>
+            <a:pPr>
+              <a:lnSpc>
+                <a:spcPts val="2200"/>
+              </a:lnSpc>
+              <a:spcAft>
+                <a:spcPts val="1000"/>
+              </a:spcAft>
+              <a:defRPr sz="2000" b="0">
+                <a:solidFill>
+                  <a:srgbClr val="333333"/>
+                </a:solidFill>
+                <a:latin typeface="Calibri"/>
+              </a:defRPr>
+            </a:pPr>
+            <a:r>
+              <a:t>      basic testbench).</a:t>
+            </a:r>
+          </a:p>
+        </p:txBody>
+      </p:sp>
+      <p:sp>
+        <p:nvSpPr>
+          <p:cNvPr id="4" name="TextBox 3"/>
+          <p:cNvSpPr txBox="1"/>
+          <p:nvPr/>
+        </p:nvSpPr>
+        <p:spPr>
+          <a:xfrm>
+            <a:off x="548640" y="6355080"/>
+            <a:ext cx="11064240" cy="320040"/>
+          </a:xfrm>
+          <a:prstGeom prst="rect">
+            <a:avLst/>
+          </a:prstGeom>
+          <a:noFill/>
+        </p:spPr>
+        <p:txBody>
+          <a:bodyPr wrap="square">
+            <a:noAutofit/>
+          </a:bodyPr>
+          <a:lstStyle/>
+          <a:p>
+            <a:pPr algn="r">
+              <a:lnSpc>
+                <a:spcPts val="2200"/>
+              </a:lnSpc>
+              <a:defRPr sz="1000" b="0">
+                <a:solidFill>
+                  <a:srgbClr val="666666"/>
+                </a:solidFill>
+                <a:latin typeface="Calibri"/>
+              </a:defRPr>
+            </a:pPr>
+            <a:r>
+              <a:t>learn_uart_spi_i2c / Module 2</a:t>
+            </a:r>
+          </a:p>
+        </p:txBody>
+      </p:sp>
+    </p:spTree>
+  </p:cSld>
+  <p:clrMapOvr>
+    <a:masterClrMapping/>
+  </p:clrMapOvr>
+</p:sld>
+</file>
+
+<file path=ppt/slides/slide36.xml><?xml version="1.0" encoding="utf-8"?>
+<p:sld xmlns:a="http://schemas.openxmlformats.org/drawingml/2006/main" xmlns:p="http://schemas.openxmlformats.org/presentationml/2006/main" xmlns:r="http://schemas.openxmlformats.org/officeDocument/2006/relationships">
+  <p:cSld>
+    <p:spTree>
+      <p:nvGrpSpPr>
+        <p:cNvPr id="1" name=""/>
+        <p:cNvGrpSpPr/>
+        <p:nvPr/>
+      </p:nvGrpSpPr>
+      <p:grpSpPr/>
+      <p:sp>
+        <p:nvSpPr>
+          <p:cNvPr id="2" name="TextBox 1"/>
+          <p:cNvSpPr txBox="1"/>
+          <p:nvPr/>
+        </p:nvSpPr>
+        <p:spPr>
+          <a:xfrm>
+            <a:off x="548640" y="411480"/>
+            <a:ext cx="11064240" cy="777240"/>
+          </a:xfrm>
+          <a:prstGeom prst="rect">
+            <a:avLst/>
+          </a:prstGeom>
+          <a:noFill/>
+        </p:spPr>
+        <p:txBody>
+          <a:bodyPr wrap="square">
+            <a:noAutofit/>
+          </a:bodyPr>
+          <a:lstStyle/>
+          <a:p>
+            <a:pPr>
+              <a:lnSpc>
+                <a:spcPts val="2200"/>
+              </a:lnSpc>
+              <a:defRPr sz="2800" b="1">
+                <a:solidFill>
+                  <a:srgbClr val="1A1A2E"/>
+                </a:solidFill>
+                <a:latin typeface="Calibri"/>
+              </a:defRPr>
+            </a:pPr>
+            <a:r>
+              <a:t>Summary &amp; next steps</a:t>
+            </a:r>
+          </a:p>
+        </p:txBody>
+      </p:sp>
+      <p:sp>
+        <p:nvSpPr>
+          <p:cNvPr id="3" name="TextBox 2"/>
+          <p:cNvSpPr txBox="1"/>
+          <p:nvPr/>
+        </p:nvSpPr>
+        <p:spPr>
+          <a:xfrm>
+            <a:off x="548640" y="1234440"/>
+            <a:ext cx="11064240" cy="4937760"/>
+          </a:xfrm>
+          <a:prstGeom prst="rect">
+            <a:avLst/>
+          </a:prstGeom>
+          <a:noFill/>
+        </p:spPr>
+        <p:txBody>
+          <a:bodyPr wrap="square">
+            <a:noAutofit/>
+          </a:bodyPr>
+          <a:lstStyle/>
+          <a:p>
+            <a:pPr>
+              <a:lnSpc>
+                <a:spcPts val="2200"/>
+              </a:lnSpc>
+              <a:spcAft>
+                <a:spcPts val="1000"/>
+              </a:spcAft>
+              <a:defRPr sz="2000" b="0">
+                <a:solidFill>
+                  <a:srgbClr val="333333"/>
+                </a:solidFill>
+                <a:latin typeface="Calibri"/>
+              </a:defRPr>
+            </a:pPr>
+            <a:r>
+              <a:t>• Understand basic testbench patterns (directed tests,</a:t>
+            </a:r>
+          </a:p>
+          <a:p>
+            <a:pPr>
+              <a:lnSpc>
+                <a:spcPts val="2200"/>
+              </a:lnSpc>
+              <a:spcAft>
+                <a:spcPts val="1000"/>
+              </a:spcAft>
+              <a:defRPr sz="2000" b="0">
+                <a:solidFill>
+                  <a:srgbClr val="333333"/>
+                </a:solidFill>
+                <a:latin typeface="Calibri"/>
+              </a:defRPr>
+            </a:pPr>
+            <a:r>
+              <a:t>      pin wiggling), the evolution to a UVM+SV testb…</a:t>
+            </a:r>
+          </a:p>
+          <a:p>
+            <a:pPr>
+              <a:lnSpc>
+                <a:spcPts val="2200"/>
+              </a:lnSpc>
+              <a:spcAft>
+                <a:spcPts val="1000"/>
+              </a:spcAft>
+              <a:defRPr sz="2000" b="0">
+                <a:solidFill>
+                  <a:srgbClr val="333333"/>
+                </a:solidFill>
+                <a:latin typeface="Calibri"/>
+              </a:defRPr>
+            </a:pPr>
+            <a:r>
+              <a:t>• Complete module2/CHECKLIST.md</a:t>
+            </a:r>
+          </a:p>
+          <a:p>
+            <a:pPr>
+              <a:lnSpc>
+                <a:spcPts val="2200"/>
+              </a:lnSpc>
+              <a:spcAft>
+                <a:spcPts val="1000"/>
+              </a:spcAft>
+              <a:defRPr sz="2000" b="0">
+                <a:solidFill>
+                  <a:srgbClr val="333333"/>
+                </a:solidFill>
+                <a:latin typeface="Calibri"/>
+              </a:defRPr>
+            </a:pPr>
+            <a:r>
+              <a:t>• Review module2/EXAMPLES.md and run each lab</a:t>
+            </a:r>
+          </a:p>
+          <a:p>
+            <a:pPr>
+              <a:lnSpc>
+                <a:spcPts val="2200"/>
+              </a:lnSpc>
+              <a:spcAft>
+                <a:spcPts val="1000"/>
+              </a:spcAft>
+              <a:defRPr sz="2000" b="0">
+                <a:solidFill>
+                  <a:srgbClr val="333333"/>
+                </a:solidFill>
+                <a:latin typeface="Calibri"/>
+              </a:defRPr>
+            </a:pPr>
+            <a:r>
+              <a:t>• Next: UART</a:t>
+            </a:r>
+          </a:p>
+        </p:txBody>
+      </p:sp>
+      <p:sp>
+        <p:nvSpPr>
+          <p:cNvPr id="4" name="TextBox 3"/>
+          <p:cNvSpPr txBox="1"/>
+          <p:nvPr/>
+        </p:nvSpPr>
+        <p:spPr>
+          <a:xfrm>
+            <a:off x="548640" y="6355080"/>
+            <a:ext cx="11064240" cy="320040"/>
+          </a:xfrm>
+          <a:prstGeom prst="rect">
+            <a:avLst/>
+          </a:prstGeom>
+          <a:noFill/>
+        </p:spPr>
+        <p:txBody>
+          <a:bodyPr wrap="square">
+            <a:noAutofit/>
+          </a:bodyPr>
+          <a:lstStyle/>
+          <a:p>
+            <a:pPr algn="r">
+              <a:lnSpc>
+                <a:spcPts val="2200"/>
+              </a:lnSpc>
+              <a:defRPr sz="1000" b="0">
+                <a:solidFill>
+                  <a:srgbClr val="666666"/>
+                </a:solidFill>
+                <a:latin typeface="Calibri"/>
+              </a:defRPr>
+            </a:pPr>
+            <a:r>
+              <a:t>learn_uart_spi_i2c / Module 2</a:t>
+            </a:r>
+          </a:p>
+        </p:txBody>
+      </p:sp>
+    </p:spTree>
+  </p:cSld>
+  <p:clrMapOvr>
+    <a:masterClrMapping/>
+  </p:clrMapOvr>
+</p:sld>
+</file>
+
 <file path=ppt/slides/slide4.xml><?xml version="1.0" encoding="utf-8"?>
 <p:sld xmlns:a="http://schemas.openxmlformats.org/drawingml/2006/main" xmlns:p="http://schemas.openxmlformats.org/presentationml/2006/main" xmlns:r="http://schemas.openxmlformats.org/officeDocument/2006/relationships">
   <p:cSld>
@@ -6946,7 +10482,7 @@
               </a:defRPr>
             </a:pPr>
             <a:r>
-              <a:t>Syllabus topics</a:t>
+              <a:t>How to learn this module</a:t>
             </a:r>
           </a:p>
         </p:txBody>
@@ -7042,7 +10578,7 @@
               </a:defRPr>
             </a:pPr>
             <a:r>
-              <a:t>1. Basic Testbench (Directed Tests, Pin Wiggling)</a:t>
+              <a:t>Suggested learning path</a:t>
             </a:r>
           </a:p>
         </p:txBody>
@@ -7084,7 +10620,7 @@
               </a:defRPr>
             </a:pPr>
             <a:r>
-              <a:t>• Directed test: Drive specific inputs (e.g., reset,</a:t>
+              <a:t>• Complete Module 1 — run `spec_to_rtl` and understand</a:t>
             </a:r>
           </a:p>
           <a:p>
@@ -7103,7 +10639,7 @@
               </a:defRPr>
             </a:pPr>
             <a:r>
-              <a:t>      then a fixed sequence of data) and check expecte…</a:t>
+              <a:t>      spec → RTL → directed check.</a:t>
             </a:r>
           </a:p>
           <a:p>
@@ -7122,7 +10658,7 @@
               </a:defRPr>
             </a:pPr>
             <a:r>
-              <a:t>• Pin wiggling: The testbench directly drives and</a:t>
+              <a:t>• Read this module’s Design Architecture and</a:t>
             </a:r>
           </a:p>
           <a:p>
@@ -7141,7 +10677,83 @@
               </a:defRPr>
             </a:pPr>
             <a:r>
-              <a:t>      samples DUT pins (clock, reset, data, enable) — no…</a:t>
+              <a:t>      Verification sections before `uvm_smoke`.</a:t>
+            </a:r>
+          </a:p>
+          <a:p>
+            <a:pPr>
+              <a:lnSpc>
+                <a:spcPts val="2200"/>
+              </a:lnSpc>
+              <a:spcAft>
+                <a:spcPts val="1000"/>
+              </a:spcAft>
+              <a:defRPr sz="2000" b="0">
+                <a:solidFill>
+                  <a:srgbClr val="333333"/>
+                </a:solidFill>
+                <a:latin typeface="Calibri"/>
+              </a:defRPr>
+            </a:pPr>
+            <a:r>
+              <a:t>• Set UVM_HOME (or use vendored UVM under `tools/`) —</a:t>
+            </a:r>
+          </a:p>
+          <a:p>
+            <a:pPr>
+              <a:lnSpc>
+                <a:spcPts val="2200"/>
+              </a:lnSpc>
+              <a:spcAft>
+                <a:spcPts val="1000"/>
+              </a:spcAft>
+              <a:defRPr sz="2000" b="0">
+                <a:solidFill>
+                  <a:srgbClr val="333333"/>
+                </a:solidFill>
+                <a:latin typeface="Calibri"/>
+              </a:defRPr>
+            </a:pPr>
+            <a:r>
+              <a:t>      see Command Reference.</a:t>
+            </a:r>
+          </a:p>
+          <a:p>
+            <a:pPr>
+              <a:lnSpc>
+                <a:spcPts val="2200"/>
+              </a:lnSpc>
+              <a:spcAft>
+                <a:spcPts val="1000"/>
+              </a:spcAft>
+              <a:defRPr sz="2000" b="0">
+                <a:solidFill>
+                  <a:srgbClr val="333333"/>
+                </a:solidFill>
+                <a:latin typeface="Calibri"/>
+              </a:defRPr>
+            </a:pPr>
+            <a:r>
+              <a:t>• Run `uvm_smoke` and trace one transaction from</a:t>
+            </a:r>
+          </a:p>
+          <a:p>
+            <a:pPr>
+              <a:lnSpc>
+                <a:spcPts val="2200"/>
+              </a:lnSpc>
+              <a:spcAft>
+                <a:spcPts val="1000"/>
+              </a:spcAft>
+              <a:defRPr sz="2000" b="0">
+                <a:solidFill>
+                  <a:srgbClr val="333333"/>
+                </a:solidFill>
+                <a:latin typeface="Calibri"/>
+              </a:defRPr>
+            </a:pPr>
+            <a:r>
+              <a:t>      sequence → driver → DUT → monitor → scoreboard.</a:t>
             </a:r>
           </a:p>
         </p:txBody>
@@ -7211,8 +10823,8 @@
         </p:nvSpPr>
         <p:spPr>
           <a:xfrm>
-            <a:off x="548640" y="411480"/>
-            <a:ext cx="11064240" cy="777240"/>
+            <a:off x="548640" y="2743200"/>
+            <a:ext cx="11064240" cy="1371600"/>
           </a:xfrm>
           <a:prstGeom prst="rect">
             <a:avLst/>
@@ -7225,11 +10837,11 @@
           </a:bodyPr>
           <a:lstStyle/>
           <a:p>
-            <a:pPr>
-              <a:lnSpc>
-                <a:spcPts val="2200"/>
-              </a:lnSpc>
-              <a:defRPr sz="2800" b="1">
+            <a:pPr algn="ctr">
+              <a:lnSpc>
+                <a:spcPts val="2200"/>
+              </a:lnSpc>
+              <a:defRPr sz="3600" b="1">
                 <a:solidFill>
                   <a:srgbClr val="1A1A2E"/>
                 </a:solidFill>
@@ -7237,7 +10849,7 @@
               </a:defRPr>
             </a:pPr>
             <a:r>
-              <a:t>2. Evolution to UVM+SV Testbench</a:t>
+              <a:t>Design architecture</a:t>
             </a:r>
           </a:p>
         </p:txBody>
@@ -7245,219 +10857,6 @@
       <p:sp>
         <p:nvSpPr>
           <p:cNvPr id="3" name="TextBox 2"/>
-          <p:cNvSpPr txBox="1"/>
-          <p:nvPr/>
-        </p:nvSpPr>
-        <p:spPr>
-          <a:xfrm>
-            <a:off x="548640" y="1234440"/>
-            <a:ext cx="11064240" cy="4937760"/>
-          </a:xfrm>
-          <a:prstGeom prst="rect">
-            <a:avLst/>
-          </a:prstGeom>
-          <a:noFill/>
-        </p:spPr>
-        <p:txBody>
-          <a:bodyPr wrap="square">
-            <a:noAutofit/>
-          </a:bodyPr>
-          <a:lstStyle/>
-          <a:p>
-            <a:pPr>
-              <a:lnSpc>
-                <a:spcPts val="2200"/>
-              </a:lnSpc>
-              <a:spcAft>
-                <a:spcPts val="1000"/>
-              </a:spcAft>
-              <a:defRPr sz="2000" b="0">
-                <a:solidFill>
-                  <a:srgbClr val="333333"/>
-                </a:solidFill>
-                <a:latin typeface="Calibri"/>
-              </a:defRPr>
-            </a:pPr>
-            <a:r>
-              <a:t>• Sequence: Produces a stream of transactions (e.g., a</a:t>
-            </a:r>
-          </a:p>
-          <a:p>
-            <a:pPr>
-              <a:lnSpc>
-                <a:spcPts val="2200"/>
-              </a:lnSpc>
-              <a:spcAft>
-                <a:spcPts val="1000"/>
-              </a:spcAft>
-              <a:defRPr sz="2000" b="0">
-                <a:solidFill>
-                  <a:srgbClr val="333333"/>
-                </a:solidFill>
-                <a:latin typeface="Calibri"/>
-              </a:defRPr>
-            </a:pPr>
-            <a:r>
-              <a:t>      few directed values: 0x00, 0x01, 0x55, 0xAA, 0…</a:t>
-            </a:r>
-          </a:p>
-          <a:p>
-            <a:pPr>
-              <a:lnSpc>
-                <a:spcPts val="2200"/>
-              </a:lnSpc>
-              <a:spcAft>
-                <a:spcPts val="1000"/>
-              </a:spcAft>
-              <a:defRPr sz="2000" b="0">
-                <a:solidFill>
-                  <a:srgbClr val="333333"/>
-                </a:solidFill>
-                <a:latin typeface="Calibri"/>
-              </a:defRPr>
-            </a:pPr>
-            <a:r>
-              <a:t>• Driver: Gets transactions from the sequencer and</a:t>
-            </a:r>
-          </a:p>
-          <a:p>
-            <a:pPr>
-              <a:lnSpc>
-                <a:spcPts val="2200"/>
-              </a:lnSpc>
-              <a:spcAft>
-                <a:spcPts val="1000"/>
-              </a:spcAft>
-              <a:defRPr sz="2000" b="0">
-                <a:solidFill>
-                  <a:srgbClr val="333333"/>
-                </a:solidFill>
-                <a:latin typeface="Calibri"/>
-              </a:defRPr>
-            </a:pPr>
-            <a:r>
-              <a:t>      drives the DUT interface (e.g., set enable and d o…</a:t>
-            </a:r>
-          </a:p>
-          <a:p>
-            <a:pPr>
-              <a:lnSpc>
-                <a:spcPts val="2200"/>
-              </a:lnSpc>
-              <a:spcAft>
-                <a:spcPts val="1000"/>
-              </a:spcAft>
-              <a:defRPr sz="2000" b="0">
-                <a:solidFill>
-                  <a:srgbClr val="333333"/>
-                </a:solidFill>
-                <a:latin typeface="Calibri"/>
-              </a:defRPr>
-            </a:pPr>
-            <a:r>
-              <a:t>• Monitor: Observes the DUT interface and turns pin</a:t>
-            </a:r>
-          </a:p>
-          <a:p>
-            <a:pPr>
-              <a:lnSpc>
-                <a:spcPts val="2200"/>
-              </a:lnSpc>
-              <a:spcAft>
-                <a:spcPts val="1000"/>
-              </a:spcAft>
-              <a:defRPr sz="2000" b="0">
-                <a:solidFill>
-                  <a:srgbClr val="333333"/>
-                </a:solidFill>
-                <a:latin typeface="Calibri"/>
-              </a:defRPr>
-            </a:pPr>
-            <a:r>
-              <a:t>      activity into transactions, then sends them to th…</a:t>
-            </a:r>
-          </a:p>
-          <a:p>
-            <a:pPr>
-              <a:lnSpc>
-                <a:spcPts val="2200"/>
-              </a:lnSpc>
-              <a:spcAft>
-                <a:spcPts val="1000"/>
-              </a:spcAft>
-              <a:defRPr sz="2000" b="0">
-                <a:solidFill>
-                  <a:srgbClr val="333333"/>
-                </a:solidFill>
-                <a:latin typeface="Calibri"/>
-              </a:defRPr>
-            </a:pPr>
-            <a:r>
-              <a:t>• Scoreboard: Compares “expected” (what we sent) vs</a:t>
-            </a:r>
-          </a:p>
-          <a:p>
-            <a:pPr>
-              <a:lnSpc>
-                <a:spcPts val="2200"/>
-              </a:lnSpc>
-              <a:spcAft>
-                <a:spcPts val="1000"/>
-              </a:spcAft>
-              <a:defRPr sz="2000" b="0">
-                <a:solidFill>
-                  <a:srgbClr val="333333"/>
-                </a:solidFill>
-                <a:latin typeface="Calibri"/>
-              </a:defRPr>
-            </a:pPr>
-            <a:r>
-              <a:t>      “observed” (what the monitor saw). Reports matche…</a:t>
-            </a:r>
-          </a:p>
-          <a:p>
-            <a:pPr>
-              <a:lnSpc>
-                <a:spcPts val="2200"/>
-              </a:lnSpc>
-              <a:spcAft>
-                <a:spcPts val="1000"/>
-              </a:spcAft>
-              <a:defRPr sz="2000" b="0">
-                <a:solidFill>
-                  <a:srgbClr val="333333"/>
-                </a:solidFill>
-                <a:latin typeface="Calibri"/>
-              </a:defRPr>
-            </a:pPr>
-            <a:r>
-              <a:t>• Agent: Groups driver, monitor, and sequencer for one</a:t>
-            </a:r>
-          </a:p>
-          <a:p>
-            <a:pPr>
-              <a:lnSpc>
-                <a:spcPts val="2200"/>
-              </a:lnSpc>
-              <a:spcAft>
-                <a:spcPts val="1000"/>
-              </a:spcAft>
-              <a:defRPr sz="2000" b="0">
-                <a:solidFill>
-                  <a:srgbClr val="333333"/>
-                </a:solidFill>
-                <a:latin typeface="Calibri"/>
-              </a:defRPr>
-            </a:pPr>
-            <a:r>
-              <a:t>      interface. Env: Contains agent(s) and scoreboa…</a:t>
-            </a:r>
-          </a:p>
-        </p:txBody>
-      </p:sp>
-      <p:sp>
-        <p:nvSpPr>
-          <p:cNvPr id="4" name="TextBox 3"/>
           <p:cNvSpPr txBox="1"/>
           <p:nvPr/>
         </p:nvSpPr>
@@ -7546,21 +10945,45 @@
               </a:defRPr>
             </a:pPr>
             <a:r>
-              <a:t>3. Toolchain (Verilator, UVM_HOME, Make)</a:t>
-            </a:r>
-          </a:p>
-        </p:txBody>
-      </p:sp>
-      <p:sp>
-        <p:nvSpPr>
-          <p:cNvPr id="3" name="TextBox 2"/>
+              <a:t>RTL / block architecture</a:t>
+            </a:r>
+          </a:p>
+        </p:txBody>
+      </p:sp>
+      <p:pic>
+        <p:nvPicPr>
+          <p:cNvPr id="3" name="Picture 2" descr="rtl_architecture.png"/>
+          <p:cNvPicPr>
+            <a:picLocks noChangeAspect="1"/>
+          </p:cNvPicPr>
+          <p:nvPr/>
+        </p:nvPicPr>
+        <p:blipFill>
+          <a:blip r:embed="rId2"/>
+          <a:stretch>
+            <a:fillRect/>
+          </a:stretch>
+        </p:blipFill>
+        <p:spPr>
+          <a:xfrm>
+            <a:off x="548640" y="1143000"/>
+            <a:ext cx="8128000" cy="4572000"/>
+          </a:xfrm>
+          <a:prstGeom prst="rect">
+            <a:avLst/>
+          </a:prstGeom>
+        </p:spPr>
+      </p:pic>
+      <p:sp>
+        <p:nvSpPr>
+          <p:cNvPr id="4" name="TextBox 3"/>
           <p:cNvSpPr txBox="1"/>
           <p:nvPr/>
         </p:nvSpPr>
         <p:spPr>
           <a:xfrm>
-            <a:off x="548640" y="1234440"/>
-            <a:ext cx="11064240" cy="4937760"/>
+            <a:off x="548640" y="5897880"/>
+            <a:ext cx="11064240" cy="411480"/>
           </a:xfrm>
           <a:prstGeom prst="rect">
             <a:avLst/>
@@ -7577,10 +11000,7 @@
               <a:lnSpc>
                 <a:spcPts val="2200"/>
               </a:lnSpc>
-              <a:spcAft>
-                <a:spcPts val="1000"/>
-              </a:spcAft>
-              <a:defRPr sz="2000" b="0">
+              <a:defRPr sz="1200" b="0">
                 <a:solidFill>
                   <a:srgbClr val="333333"/>
                 </a:solidFill>
@@ -7588,109 +11008,14 @@
               </a:defRPr>
             </a:pPr>
             <a:r>
-              <a:t>• Verilator: Compiles SystemVerilog (including UVM) +</a:t>
-            </a:r>
-          </a:p>
-          <a:p>
-            <a:pPr>
-              <a:lnSpc>
-                <a:spcPts val="2200"/>
-              </a:lnSpc>
-              <a:spcAft>
-                <a:spcPts val="1000"/>
-              </a:spcAft>
-              <a:defRPr sz="2000" b="0">
-                <a:solidFill>
-                  <a:srgbClr val="333333"/>
-                </a:solidFill>
-                <a:latin typeface="Calibri"/>
-              </a:defRPr>
-            </a:pPr>
-            <a:r>
-              <a:t>      C++ into an executable. Key flags: `-sv`, `--ti…</a:t>
-            </a:r>
-          </a:p>
-          <a:p>
-            <a:pPr>
-              <a:lnSpc>
-                <a:spcPts val="2200"/>
-              </a:lnSpc>
-              <a:spcAft>
-                <a:spcPts val="1000"/>
-              </a:spcAft>
-              <a:defRPr sz="2000" b="0">
-                <a:solidFill>
-                  <a:srgbClr val="333333"/>
-                </a:solidFill>
-                <a:latin typeface="Calibri"/>
-              </a:defRPr>
-            </a:pPr>
-            <a:r>
-              <a:t>• UVM_HOME: Points to the UVM library root; the build</a:t>
-            </a:r>
-          </a:p>
-          <a:p>
-            <a:pPr>
-              <a:lnSpc>
-                <a:spcPts val="2200"/>
-              </a:lnSpc>
-              <a:spcAft>
-                <a:spcPts val="1000"/>
-              </a:spcAft>
-              <a:defRPr sz="2000" b="0">
-                <a:solidFill>
-                  <a:srgbClr val="333333"/>
-                </a:solidFill>
-                <a:latin typeface="Calibri"/>
-              </a:defRPr>
-            </a:pPr>
-            <a:r>
-              <a:t>      uses `$(UVM_HOME)/src/uvm_pkg.sv` and `+incdir+…</a:t>
-            </a:r>
-          </a:p>
-          <a:p>
-            <a:pPr>
-              <a:lnSpc>
-                <a:spcPts val="2200"/>
-              </a:lnSpc>
-              <a:spcAft>
-                <a:spcPts val="1000"/>
-              </a:spcAft>
-              <a:defRPr sz="2000" b="0">
-                <a:solidFill>
-                  <a:srgbClr val="333333"/>
-                </a:solidFill>
-                <a:latin typeface="Calibri"/>
-              </a:defRPr>
-            </a:pPr>
-            <a:r>
-              <a:t>• Make: One target to compile (Verilator + make in</a:t>
-            </a:r>
-          </a:p>
-          <a:p>
-            <a:pPr>
-              <a:lnSpc>
-                <a:spcPts val="2200"/>
-              </a:lnSpc>
-              <a:spcAft>
-                <a:spcPts val="1000"/>
-              </a:spcAft>
-              <a:defRPr sz="2000" b="0">
-                <a:solidFill>
-                  <a:srgbClr val="333333"/>
-                </a:solidFill>
-                <a:latin typeface="Calibri"/>
-              </a:defRPr>
-            </a:pPr>
-            <a:r>
-              <a:t>      obj_dir), one to run (`./obj_dir/Vtest_uvm_smoke +…</a:t>
-            </a:r>
-          </a:p>
-        </p:txBody>
-      </p:sp>
-      <p:sp>
-        <p:nvSpPr>
-          <p:cNvPr id="4" name="TextBox 3"/>
+              <a:t>Module 2: DUT / block hierarchy (see module2/examples/).</a:t>
+            </a:r>
+          </a:p>
+        </p:txBody>
+      </p:sp>
+      <p:sp>
+        <p:nvSpPr>
+          <p:cNvPr id="5" name="TextBox 4"/>
           <p:cNvSpPr txBox="1"/>
           <p:nvPr/>
         </p:nvSpPr>
